--- a/Pregrado/Trabajo de grado 3/Clases/Sesion 10 - Resumen, palabras clave UNESCO, conclusiones y referencias/Presentacion.pptx
+++ b/Pregrado/Trabajo de grado 3/Clases/Sesion 10 - Resumen, palabras clave UNESCO, conclusiones y referencias/Presentacion.pptx
@@ -3371,41 +3371,6 @@
           </a:p>
         </p:txBody>
       </p:sp>
-      <p:sp>
-        <p:nvSpPr>
-          <p:cNvPr id="7" name="TextBox 6"/>
-          <p:cNvSpPr txBox="1"/>
-          <p:nvPr/>
-        </p:nvSpPr>
-        <p:spPr>
-          <a:xfrm>
-            <a:off x="2194560" y="6446520"/>
-            <a:ext cx="5943600" cy="274320"/>
-          </a:xfrm>
-          <a:prstGeom prst="rect">
-            <a:avLst/>
-          </a:prstGeom>
-          <a:noFill/>
-        </p:spPr>
-        <p:txBody>
-          <a:bodyPr wrap="square" anchor="t" lIns="0" rIns="0" tIns="0" bIns="0">
-            <a:spAutoFit/>
-          </a:bodyPr>
-          <a:lstStyle/>
-          <a:p>
-            <a:pPr algn="l"/>
-            <a:r>
-              <a:rPr sz="1000" b="1" i="0">
-                <a:solidFill>
-                  <a:srgbClr val="8F989D"/>
-                </a:solidFill>
-                <a:latin typeface="Calibri"/>
-              </a:rPr>
-              <a:t>Inicio 5:10 pm</a:t>
-            </a:r>
-          </a:p>
-        </p:txBody>
-      </p:sp>
     </p:spTree>
   </p:cSld>
   <p:clrMapOvr>
@@ -3933,41 +3898,6 @@
       <p:sp>
         <p:nvSpPr>
           <p:cNvPr id="5" name="TextBox 4"/>
-          <p:cNvSpPr txBox="1"/>
-          <p:nvPr/>
-        </p:nvSpPr>
-        <p:spPr>
-          <a:xfrm>
-            <a:off x="2194560" y="6446520"/>
-            <a:ext cx="5943600" cy="274320"/>
-          </a:xfrm>
-          <a:prstGeom prst="rect">
-            <a:avLst/>
-          </a:prstGeom>
-          <a:noFill/>
-        </p:spPr>
-        <p:txBody>
-          <a:bodyPr wrap="square" anchor="t" lIns="0" rIns="0" tIns="0" bIns="0">
-            <a:spAutoFit/>
-          </a:bodyPr>
-          <a:lstStyle/>
-          <a:p>
-            <a:pPr algn="l"/>
-            <a:r>
-              <a:rPr sz="1000" b="1" i="0">
-                <a:solidFill>
-                  <a:srgbClr val="8F989D"/>
-                </a:solidFill>
-                <a:latin typeface="Calibri"/>
-              </a:rPr>
-              <a:t>Inicio 5:10 pm</a:t>
-            </a:r>
-          </a:p>
-        </p:txBody>
-      </p:sp>
-      <p:sp>
-        <p:nvSpPr>
-          <p:cNvPr id="6" name="TextBox 5"/>
           <p:cNvSpPr txBox="1"/>
           <p:nvPr/>
         </p:nvSpPr>
@@ -4689,41 +4619,6 @@
         </p:nvSpPr>
         <p:spPr>
           <a:xfrm>
-            <a:off x="2194560" y="6446520"/>
-            <a:ext cx="5943600" cy="274320"/>
-          </a:xfrm>
-          <a:prstGeom prst="rect">
-            <a:avLst/>
-          </a:prstGeom>
-          <a:noFill/>
-        </p:spPr>
-        <p:txBody>
-          <a:bodyPr wrap="square" anchor="t" lIns="0" rIns="0" tIns="0" bIns="0">
-            <a:spAutoFit/>
-          </a:bodyPr>
-          <a:lstStyle/>
-          <a:p>
-            <a:pPr algn="l"/>
-            <a:r>
-              <a:rPr sz="1000" b="1" i="0">
-                <a:solidFill>
-                  <a:srgbClr val="8F989D"/>
-                </a:solidFill>
-                <a:latin typeface="Calibri"/>
-              </a:rPr>
-              <a:t>Inicio 5:10 pm</a:t>
-            </a:r>
-          </a:p>
-        </p:txBody>
-      </p:sp>
-      <p:sp>
-        <p:nvSpPr>
-          <p:cNvPr id="7" name="TextBox 6"/>
-          <p:cNvSpPr txBox="1"/>
-          <p:nvPr/>
-        </p:nvSpPr>
-        <p:spPr>
-          <a:xfrm>
             <a:off x="11094415" y="6446520"/>
             <a:ext cx="548640" cy="274320"/>
           </a:xfrm>
@@ -5166,41 +5061,6 @@
         </p:nvSpPr>
         <p:spPr>
           <a:xfrm>
-            <a:off x="2194560" y="6446520"/>
-            <a:ext cx="5943600" cy="274320"/>
-          </a:xfrm>
-          <a:prstGeom prst="rect">
-            <a:avLst/>
-          </a:prstGeom>
-          <a:noFill/>
-        </p:spPr>
-        <p:txBody>
-          <a:bodyPr wrap="square" anchor="t" lIns="0" rIns="0" tIns="0" bIns="0">
-            <a:spAutoFit/>
-          </a:bodyPr>
-          <a:lstStyle/>
-          <a:p>
-            <a:pPr algn="l"/>
-            <a:r>
-              <a:rPr sz="1000" b="1" i="0">
-                <a:solidFill>
-                  <a:srgbClr val="8F989D"/>
-                </a:solidFill>
-                <a:latin typeface="Calibri"/>
-              </a:rPr>
-              <a:t>Inicio 5:10 pm</a:t>
-            </a:r>
-          </a:p>
-        </p:txBody>
-      </p:sp>
-      <p:sp>
-        <p:nvSpPr>
-          <p:cNvPr id="6" name="TextBox 5"/>
-          <p:cNvSpPr txBox="1"/>
-          <p:nvPr/>
-        </p:nvSpPr>
-        <p:spPr>
-          <a:xfrm>
             <a:off x="11094415" y="6446520"/>
             <a:ext cx="548640" cy="274320"/>
           </a:xfrm>
@@ -5411,41 +5271,6 @@
       <p:sp>
         <p:nvSpPr>
           <p:cNvPr id="5" name="TextBox 4"/>
-          <p:cNvSpPr txBox="1"/>
-          <p:nvPr/>
-        </p:nvSpPr>
-        <p:spPr>
-          <a:xfrm>
-            <a:off x="2194560" y="6446520"/>
-            <a:ext cx="5943600" cy="274320"/>
-          </a:xfrm>
-          <a:prstGeom prst="rect">
-            <a:avLst/>
-          </a:prstGeom>
-          <a:noFill/>
-        </p:spPr>
-        <p:txBody>
-          <a:bodyPr wrap="square" anchor="t" lIns="0" rIns="0" tIns="0" bIns="0">
-            <a:spAutoFit/>
-          </a:bodyPr>
-          <a:lstStyle/>
-          <a:p>
-            <a:pPr algn="l"/>
-            <a:r>
-              <a:rPr sz="1000" b="1" i="0">
-                <a:solidFill>
-                  <a:srgbClr val="8F989D"/>
-                </a:solidFill>
-                <a:latin typeface="Calibri"/>
-              </a:rPr>
-              <a:t>Inicio 5:10 pm</a:t>
-            </a:r>
-          </a:p>
-        </p:txBody>
-      </p:sp>
-      <p:sp>
-        <p:nvSpPr>
-          <p:cNvPr id="6" name="TextBox 5"/>
           <p:cNvSpPr txBox="1"/>
           <p:nvPr/>
         </p:nvSpPr>
@@ -6025,41 +5850,6 @@
         </p:nvSpPr>
         <p:spPr>
           <a:xfrm>
-            <a:off x="2194560" y="6446520"/>
-            <a:ext cx="5943600" cy="274320"/>
-          </a:xfrm>
-          <a:prstGeom prst="rect">
-            <a:avLst/>
-          </a:prstGeom>
-          <a:noFill/>
-        </p:spPr>
-        <p:txBody>
-          <a:bodyPr wrap="square" anchor="t" lIns="0" rIns="0" tIns="0" bIns="0">
-            <a:spAutoFit/>
-          </a:bodyPr>
-          <a:lstStyle/>
-          <a:p>
-            <a:pPr algn="l"/>
-            <a:r>
-              <a:rPr sz="1000" b="1" i="0">
-                <a:solidFill>
-                  <a:srgbClr val="8F989D"/>
-                </a:solidFill>
-                <a:latin typeface="Calibri"/>
-              </a:rPr>
-              <a:t>Inicio 5:10 pm</a:t>
-            </a:r>
-          </a:p>
-        </p:txBody>
-      </p:sp>
-      <p:sp>
-        <p:nvSpPr>
-          <p:cNvPr id="7" name="TextBox 6"/>
-          <p:cNvSpPr txBox="1"/>
-          <p:nvPr/>
-        </p:nvSpPr>
-        <p:spPr>
-          <a:xfrm>
             <a:off x="11094415" y="6446520"/>
             <a:ext cx="548640" cy="274320"/>
           </a:xfrm>
@@ -6449,41 +6239,6 @@
         </p:nvSpPr>
         <p:spPr>
           <a:xfrm>
-            <a:off x="2194560" y="6446520"/>
-            <a:ext cx="5943600" cy="274320"/>
-          </a:xfrm>
-          <a:prstGeom prst="rect">
-            <a:avLst/>
-          </a:prstGeom>
-          <a:noFill/>
-        </p:spPr>
-        <p:txBody>
-          <a:bodyPr wrap="square" anchor="t" lIns="0" rIns="0" tIns="0" bIns="0">
-            <a:spAutoFit/>
-          </a:bodyPr>
-          <a:lstStyle/>
-          <a:p>
-            <a:pPr algn="l"/>
-            <a:r>
-              <a:rPr sz="1000" b="1" i="0">
-                <a:solidFill>
-                  <a:srgbClr val="8F989D"/>
-                </a:solidFill>
-                <a:latin typeface="Calibri"/>
-              </a:rPr>
-              <a:t>Inicio 5:10 pm</a:t>
-            </a:r>
-          </a:p>
-        </p:txBody>
-      </p:sp>
-      <p:sp>
-        <p:nvSpPr>
-          <p:cNvPr id="6" name="TextBox 5"/>
-          <p:cNvSpPr txBox="1"/>
-          <p:nvPr/>
-        </p:nvSpPr>
-        <p:spPr>
-          <a:xfrm>
             <a:off x="11094415" y="6446520"/>
             <a:ext cx="548640" cy="274320"/>
           </a:xfrm>
@@ -6957,41 +6712,6 @@
         </p:nvSpPr>
         <p:spPr>
           <a:xfrm>
-            <a:off x="2194560" y="6446520"/>
-            <a:ext cx="5943600" cy="274320"/>
-          </a:xfrm>
-          <a:prstGeom prst="rect">
-            <a:avLst/>
-          </a:prstGeom>
-          <a:noFill/>
-        </p:spPr>
-        <p:txBody>
-          <a:bodyPr wrap="square" anchor="t" lIns="0" rIns="0" tIns="0" bIns="0">
-            <a:spAutoFit/>
-          </a:bodyPr>
-          <a:lstStyle/>
-          <a:p>
-            <a:pPr algn="l"/>
-            <a:r>
-              <a:rPr sz="1000" b="1" i="0">
-                <a:solidFill>
-                  <a:srgbClr val="8F989D"/>
-                </a:solidFill>
-                <a:latin typeface="Calibri"/>
-              </a:rPr>
-              <a:t>Inicio 5:10 pm</a:t>
-            </a:r>
-          </a:p>
-        </p:txBody>
-      </p:sp>
-      <p:sp>
-        <p:nvSpPr>
-          <p:cNvPr id="6" name="TextBox 5"/>
-          <p:cNvSpPr txBox="1"/>
-          <p:nvPr/>
-        </p:nvSpPr>
-        <p:spPr>
-          <a:xfrm>
             <a:off x="11094415" y="6446520"/>
             <a:ext cx="548640" cy="274320"/>
           </a:xfrm>
@@ -7562,41 +7282,6 @@
         </p:nvSpPr>
         <p:spPr>
           <a:xfrm>
-            <a:off x="2194560" y="6446520"/>
-            <a:ext cx="5943600" cy="274320"/>
-          </a:xfrm>
-          <a:prstGeom prst="rect">
-            <a:avLst/>
-          </a:prstGeom>
-          <a:noFill/>
-        </p:spPr>
-        <p:txBody>
-          <a:bodyPr wrap="square" anchor="t" lIns="0" rIns="0" tIns="0" bIns="0">
-            <a:spAutoFit/>
-          </a:bodyPr>
-          <a:lstStyle/>
-          <a:p>
-            <a:pPr algn="l"/>
-            <a:r>
-              <a:rPr sz="1000" b="1" i="0">
-                <a:solidFill>
-                  <a:srgbClr val="8F989D"/>
-                </a:solidFill>
-                <a:latin typeface="Calibri"/>
-              </a:rPr>
-              <a:t>Inicio 5:10 pm</a:t>
-            </a:r>
-          </a:p>
-        </p:txBody>
-      </p:sp>
-      <p:sp>
-        <p:nvSpPr>
-          <p:cNvPr id="13" name="TextBox 12"/>
-          <p:cNvSpPr txBox="1"/>
-          <p:nvPr/>
-        </p:nvSpPr>
-        <p:spPr>
-          <a:xfrm>
             <a:off x="11094415" y="6446520"/>
             <a:ext cx="548640" cy="274320"/>
           </a:xfrm>
@@ -8149,41 +7834,6 @@
         </p:nvSpPr>
         <p:spPr>
           <a:xfrm>
-            <a:off x="2194560" y="6446520"/>
-            <a:ext cx="5943600" cy="274320"/>
-          </a:xfrm>
-          <a:prstGeom prst="rect">
-            <a:avLst/>
-          </a:prstGeom>
-          <a:noFill/>
-        </p:spPr>
-        <p:txBody>
-          <a:bodyPr wrap="square" anchor="t" lIns="0" rIns="0" tIns="0" bIns="0">
-            <a:spAutoFit/>
-          </a:bodyPr>
-          <a:lstStyle/>
-          <a:p>
-            <a:pPr algn="l"/>
-            <a:r>
-              <a:rPr sz="1000" b="1" i="0">
-                <a:solidFill>
-                  <a:srgbClr val="8F989D"/>
-                </a:solidFill>
-                <a:latin typeface="Calibri"/>
-              </a:rPr>
-              <a:t>Inicio 5:10 pm</a:t>
-            </a:r>
-          </a:p>
-        </p:txBody>
-      </p:sp>
-      <p:sp>
-        <p:nvSpPr>
-          <p:cNvPr id="13" name="TextBox 12"/>
-          <p:cNvSpPr txBox="1"/>
-          <p:nvPr/>
-        </p:nvSpPr>
-        <p:spPr>
-          <a:xfrm>
             <a:off x="11094415" y="6446520"/>
             <a:ext cx="548640" cy="274320"/>
           </a:xfrm>
@@ -8677,41 +8327,6 @@
         </p:nvSpPr>
         <p:spPr>
           <a:xfrm>
-            <a:off x="2194560" y="6446520"/>
-            <a:ext cx="5943600" cy="274320"/>
-          </a:xfrm>
-          <a:prstGeom prst="rect">
-            <a:avLst/>
-          </a:prstGeom>
-          <a:noFill/>
-        </p:spPr>
-        <p:txBody>
-          <a:bodyPr wrap="square" anchor="t" lIns="0" rIns="0" tIns="0" bIns="0">
-            <a:spAutoFit/>
-          </a:bodyPr>
-          <a:lstStyle/>
-          <a:p>
-            <a:pPr algn="l"/>
-            <a:r>
-              <a:rPr sz="1000" b="1" i="0">
-                <a:solidFill>
-                  <a:srgbClr val="8F989D"/>
-                </a:solidFill>
-                <a:latin typeface="Calibri"/>
-              </a:rPr>
-              <a:t>Inicio 5:10 pm</a:t>
-            </a:r>
-          </a:p>
-        </p:txBody>
-      </p:sp>
-      <p:sp>
-        <p:nvSpPr>
-          <p:cNvPr id="6" name="TextBox 5"/>
-          <p:cNvSpPr txBox="1"/>
-          <p:nvPr/>
-        </p:nvSpPr>
-        <p:spPr>
-          <a:xfrm>
             <a:off x="11094415" y="6446520"/>
             <a:ext cx="548640" cy="274320"/>
           </a:xfrm>
@@ -9343,41 +8958,6 @@
         </p:nvSpPr>
         <p:spPr>
           <a:xfrm>
-            <a:off x="2194560" y="6446520"/>
-            <a:ext cx="5943600" cy="274320"/>
-          </a:xfrm>
-          <a:prstGeom prst="rect">
-            <a:avLst/>
-          </a:prstGeom>
-          <a:noFill/>
-        </p:spPr>
-        <p:txBody>
-          <a:bodyPr wrap="square" anchor="t" lIns="0" rIns="0" tIns="0" bIns="0">
-            <a:spAutoFit/>
-          </a:bodyPr>
-          <a:lstStyle/>
-          <a:p>
-            <a:pPr algn="l"/>
-            <a:r>
-              <a:rPr sz="1000" b="1" i="0">
-                <a:solidFill>
-                  <a:srgbClr val="8F989D"/>
-                </a:solidFill>
-                <a:latin typeface="Calibri"/>
-              </a:rPr>
-              <a:t>Inicio 5:10 pm</a:t>
-            </a:r>
-          </a:p>
-        </p:txBody>
-      </p:sp>
-      <p:sp>
-        <p:nvSpPr>
-          <p:cNvPr id="6" name="TextBox 5"/>
-          <p:cNvSpPr txBox="1"/>
-          <p:nvPr/>
-        </p:nvSpPr>
-        <p:spPr>
-          <a:xfrm>
             <a:off x="11094415" y="6446520"/>
             <a:ext cx="548640" cy="274320"/>
           </a:xfrm>
@@ -9407,7 +8987,7 @@
       </p:sp>
       <p:sp>
         <p:nvSpPr>
-          <p:cNvPr id="7" name="TextBox 6"/>
+          <p:cNvPr id="6" name="TextBox 5"/>
           <p:cNvSpPr txBox="1"/>
           <p:nvPr/>
         </p:nvSpPr>
@@ -9718,41 +9298,6 @@
         </p:nvSpPr>
         <p:spPr>
           <a:xfrm>
-            <a:off x="2194560" y="6446520"/>
-            <a:ext cx="5943600" cy="274320"/>
-          </a:xfrm>
-          <a:prstGeom prst="rect">
-            <a:avLst/>
-          </a:prstGeom>
-          <a:noFill/>
-        </p:spPr>
-        <p:txBody>
-          <a:bodyPr wrap="square" anchor="t" lIns="0" rIns="0" tIns="0" bIns="0">
-            <a:spAutoFit/>
-          </a:bodyPr>
-          <a:lstStyle/>
-          <a:p>
-            <a:pPr algn="l"/>
-            <a:r>
-              <a:rPr sz="1000" b="1" i="0">
-                <a:solidFill>
-                  <a:srgbClr val="8F989D"/>
-                </a:solidFill>
-                <a:latin typeface="Calibri"/>
-              </a:rPr>
-              <a:t>Inicio 5:10 pm</a:t>
-            </a:r>
-          </a:p>
-        </p:txBody>
-      </p:sp>
-      <p:sp>
-        <p:nvSpPr>
-          <p:cNvPr id="6" name="TextBox 5"/>
-          <p:cNvSpPr txBox="1"/>
-          <p:nvPr/>
-        </p:nvSpPr>
-        <p:spPr>
-          <a:xfrm>
             <a:off x="11094415" y="6446520"/>
             <a:ext cx="548640" cy="274320"/>
           </a:xfrm>
@@ -9782,7 +9327,7 @@
       </p:sp>
       <p:sp>
         <p:nvSpPr>
-          <p:cNvPr id="7" name="TextBox 6"/>
+          <p:cNvPr id="6" name="TextBox 5"/>
           <p:cNvSpPr txBox="1"/>
           <p:nvPr/>
         </p:nvSpPr>
@@ -10593,41 +10138,6 @@
         </p:nvSpPr>
         <p:spPr>
           <a:xfrm>
-            <a:off x="2194560" y="6446520"/>
-            <a:ext cx="5943600" cy="274320"/>
-          </a:xfrm>
-          <a:prstGeom prst="rect">
-            <a:avLst/>
-          </a:prstGeom>
-          <a:noFill/>
-        </p:spPr>
-        <p:txBody>
-          <a:bodyPr wrap="square" anchor="t" lIns="0" rIns="0" tIns="0" bIns="0">
-            <a:spAutoFit/>
-          </a:bodyPr>
-          <a:lstStyle/>
-          <a:p>
-            <a:pPr algn="l"/>
-            <a:r>
-              <a:rPr sz="1000" b="1" i="0">
-                <a:solidFill>
-                  <a:srgbClr val="8F989D"/>
-                </a:solidFill>
-                <a:latin typeface="Calibri"/>
-              </a:rPr>
-              <a:t>Inicio 5:10 pm</a:t>
-            </a:r>
-          </a:p>
-        </p:txBody>
-      </p:sp>
-      <p:sp>
-        <p:nvSpPr>
-          <p:cNvPr id="6" name="TextBox 5"/>
-          <p:cNvSpPr txBox="1"/>
-          <p:nvPr/>
-        </p:nvSpPr>
-        <p:spPr>
-          <a:xfrm>
             <a:off x="11094415" y="6446520"/>
             <a:ext cx="548640" cy="274320"/>
           </a:xfrm>
@@ -10937,41 +10447,6 @@
         </p:nvSpPr>
         <p:spPr>
           <a:xfrm>
-            <a:off x="2194560" y="6446520"/>
-            <a:ext cx="5943600" cy="274320"/>
-          </a:xfrm>
-          <a:prstGeom prst="rect">
-            <a:avLst/>
-          </a:prstGeom>
-          <a:noFill/>
-        </p:spPr>
-        <p:txBody>
-          <a:bodyPr wrap="square" anchor="t" lIns="0" rIns="0" tIns="0" bIns="0">
-            <a:spAutoFit/>
-          </a:bodyPr>
-          <a:lstStyle/>
-          <a:p>
-            <a:pPr algn="l"/>
-            <a:r>
-              <a:rPr sz="1000" b="1" i="0">
-                <a:solidFill>
-                  <a:srgbClr val="8F989D"/>
-                </a:solidFill>
-                <a:latin typeface="Calibri"/>
-              </a:rPr>
-              <a:t>Inicio 5:10 pm</a:t>
-            </a:r>
-          </a:p>
-        </p:txBody>
-      </p:sp>
-      <p:sp>
-        <p:nvSpPr>
-          <p:cNvPr id="6" name="TextBox 5"/>
-          <p:cNvSpPr txBox="1"/>
-          <p:nvPr/>
-        </p:nvSpPr>
-        <p:spPr>
-          <a:xfrm>
             <a:off x="11094415" y="6446520"/>
             <a:ext cx="548640" cy="274320"/>
           </a:xfrm>
@@ -11409,41 +10884,6 @@
         </p:nvSpPr>
         <p:spPr>
           <a:xfrm>
-            <a:off x="2194560" y="6446520"/>
-            <a:ext cx="5943600" cy="274320"/>
-          </a:xfrm>
-          <a:prstGeom prst="rect">
-            <a:avLst/>
-          </a:prstGeom>
-          <a:noFill/>
-        </p:spPr>
-        <p:txBody>
-          <a:bodyPr wrap="square" anchor="t" lIns="0" rIns="0" tIns="0" bIns="0">
-            <a:spAutoFit/>
-          </a:bodyPr>
-          <a:lstStyle/>
-          <a:p>
-            <a:pPr algn="l"/>
-            <a:r>
-              <a:rPr sz="1000" b="1" i="0">
-                <a:solidFill>
-                  <a:srgbClr val="8F989D"/>
-                </a:solidFill>
-                <a:latin typeface="Calibri"/>
-              </a:rPr>
-              <a:t>Inicio 5:10 pm</a:t>
-            </a:r>
-          </a:p>
-        </p:txBody>
-      </p:sp>
-      <p:sp>
-        <p:nvSpPr>
-          <p:cNvPr id="6" name="TextBox 5"/>
-          <p:cNvSpPr txBox="1"/>
-          <p:nvPr/>
-        </p:nvSpPr>
-        <p:spPr>
-          <a:xfrm>
             <a:off x="11094415" y="6446520"/>
             <a:ext cx="548640" cy="274320"/>
           </a:xfrm>
@@ -11690,41 +11130,6 @@
           </a:p>
         </p:txBody>
       </p:sp>
-      <p:sp>
-        <p:nvSpPr>
-          <p:cNvPr id="7" name="TextBox 6"/>
-          <p:cNvSpPr txBox="1"/>
-          <p:nvPr/>
-        </p:nvSpPr>
-        <p:spPr>
-          <a:xfrm>
-            <a:off x="2194560" y="6446520"/>
-            <a:ext cx="5943600" cy="274320"/>
-          </a:xfrm>
-          <a:prstGeom prst="rect">
-            <a:avLst/>
-          </a:prstGeom>
-          <a:noFill/>
-        </p:spPr>
-        <p:txBody>
-          <a:bodyPr wrap="square" anchor="t" lIns="0" rIns="0" tIns="0" bIns="0">
-            <a:spAutoFit/>
-          </a:bodyPr>
-          <a:lstStyle/>
-          <a:p>
-            <a:pPr algn="l"/>
-            <a:r>
-              <a:rPr sz="1000" b="1" i="0">
-                <a:solidFill>
-                  <a:srgbClr val="8F989D"/>
-                </a:solidFill>
-                <a:latin typeface="Calibri"/>
-              </a:rPr>
-              <a:t>Inicio 5:10 pm</a:t>
-            </a:r>
-          </a:p>
-        </p:txBody>
-      </p:sp>
     </p:spTree>
   </p:cSld>
   <p:clrMapOvr>
@@ -12140,41 +11545,6 @@
         </p:nvSpPr>
         <p:spPr>
           <a:xfrm>
-            <a:off x="2194560" y="6446520"/>
-            <a:ext cx="5943600" cy="274320"/>
-          </a:xfrm>
-          <a:prstGeom prst="rect">
-            <a:avLst/>
-          </a:prstGeom>
-          <a:noFill/>
-        </p:spPr>
-        <p:txBody>
-          <a:bodyPr wrap="square" anchor="t" lIns="0" rIns="0" tIns="0" bIns="0">
-            <a:spAutoFit/>
-          </a:bodyPr>
-          <a:lstStyle/>
-          <a:p>
-            <a:pPr algn="l"/>
-            <a:r>
-              <a:rPr sz="1000" b="1" i="0">
-                <a:solidFill>
-                  <a:srgbClr val="8F989D"/>
-                </a:solidFill>
-                <a:latin typeface="Calibri"/>
-              </a:rPr>
-              <a:t>Inicio 5:10 pm</a:t>
-            </a:r>
-          </a:p>
-        </p:txBody>
-      </p:sp>
-      <p:sp>
-        <p:nvSpPr>
-          <p:cNvPr id="6" name="TextBox 5"/>
-          <p:cNvSpPr txBox="1"/>
-          <p:nvPr/>
-        </p:nvSpPr>
-        <p:spPr>
-          <a:xfrm>
             <a:off x="11094415" y="6446520"/>
             <a:ext cx="548640" cy="274320"/>
           </a:xfrm>
@@ -12367,41 +11737,6 @@
       <p:sp>
         <p:nvSpPr>
           <p:cNvPr id="5" name="TextBox 4"/>
-          <p:cNvSpPr txBox="1"/>
-          <p:nvPr/>
-        </p:nvSpPr>
-        <p:spPr>
-          <a:xfrm>
-            <a:off x="2194560" y="6446520"/>
-            <a:ext cx="5943600" cy="274320"/>
-          </a:xfrm>
-          <a:prstGeom prst="rect">
-            <a:avLst/>
-          </a:prstGeom>
-          <a:noFill/>
-        </p:spPr>
-        <p:txBody>
-          <a:bodyPr wrap="square" anchor="t" lIns="0" rIns="0" tIns="0" bIns="0">
-            <a:spAutoFit/>
-          </a:bodyPr>
-          <a:lstStyle/>
-          <a:p>
-            <a:pPr algn="l"/>
-            <a:r>
-              <a:rPr sz="1000" b="1" i="0">
-                <a:solidFill>
-                  <a:srgbClr val="8F989D"/>
-                </a:solidFill>
-                <a:latin typeface="Calibri"/>
-              </a:rPr>
-              <a:t>Inicio 5:10 pm</a:t>
-            </a:r>
-          </a:p>
-        </p:txBody>
-      </p:sp>
-      <p:sp>
-        <p:nvSpPr>
-          <p:cNvPr id="6" name="TextBox 5"/>
           <p:cNvSpPr txBox="1"/>
           <p:nvPr/>
         </p:nvSpPr>
@@ -13052,41 +12387,6 @@
         </p:nvSpPr>
         <p:spPr>
           <a:xfrm>
-            <a:off x="2194560" y="6446520"/>
-            <a:ext cx="5943600" cy="274320"/>
-          </a:xfrm>
-          <a:prstGeom prst="rect">
-            <a:avLst/>
-          </a:prstGeom>
-          <a:noFill/>
-        </p:spPr>
-        <p:txBody>
-          <a:bodyPr wrap="square" anchor="t" lIns="0" rIns="0" tIns="0" bIns="0">
-            <a:spAutoFit/>
-          </a:bodyPr>
-          <a:lstStyle/>
-          <a:p>
-            <a:pPr algn="l"/>
-            <a:r>
-              <a:rPr sz="1000" b="1" i="0">
-                <a:solidFill>
-                  <a:srgbClr val="8F989D"/>
-                </a:solidFill>
-                <a:latin typeface="Calibri"/>
-              </a:rPr>
-              <a:t>Inicio 5:10 pm</a:t>
-            </a:r>
-          </a:p>
-        </p:txBody>
-      </p:sp>
-      <p:sp>
-        <p:nvSpPr>
-          <p:cNvPr id="7" name="TextBox 6"/>
-          <p:cNvSpPr txBox="1"/>
-          <p:nvPr/>
-        </p:nvSpPr>
-        <p:spPr>
-          <a:xfrm>
             <a:off x="11094415" y="6446520"/>
             <a:ext cx="548640" cy="274320"/>
           </a:xfrm>
@@ -13540,41 +12840,6 @@
         </p:nvSpPr>
         <p:spPr>
           <a:xfrm>
-            <a:off x="2194560" y="6446520"/>
-            <a:ext cx="5943600" cy="274320"/>
-          </a:xfrm>
-          <a:prstGeom prst="rect">
-            <a:avLst/>
-          </a:prstGeom>
-          <a:noFill/>
-        </p:spPr>
-        <p:txBody>
-          <a:bodyPr wrap="square" anchor="t" lIns="0" rIns="0" tIns="0" bIns="0">
-            <a:spAutoFit/>
-          </a:bodyPr>
-          <a:lstStyle/>
-          <a:p>
-            <a:pPr algn="l"/>
-            <a:r>
-              <a:rPr sz="1000" b="1" i="0">
-                <a:solidFill>
-                  <a:srgbClr val="8F989D"/>
-                </a:solidFill>
-                <a:latin typeface="Calibri"/>
-              </a:rPr>
-              <a:t>Inicio 5:10 pm</a:t>
-            </a:r>
-          </a:p>
-        </p:txBody>
-      </p:sp>
-      <p:sp>
-        <p:nvSpPr>
-          <p:cNvPr id="6" name="TextBox 5"/>
-          <p:cNvSpPr txBox="1"/>
-          <p:nvPr/>
-        </p:nvSpPr>
-        <p:spPr>
-          <a:xfrm>
             <a:off x="11094415" y="6446520"/>
             <a:ext cx="548640" cy="274320"/>
           </a:xfrm>
@@ -14015,41 +13280,6 @@
         </p:nvSpPr>
         <p:spPr>
           <a:xfrm>
-            <a:off x="2194560" y="6446520"/>
-            <a:ext cx="5943600" cy="274320"/>
-          </a:xfrm>
-          <a:prstGeom prst="rect">
-            <a:avLst/>
-          </a:prstGeom>
-          <a:noFill/>
-        </p:spPr>
-        <p:txBody>
-          <a:bodyPr wrap="square" anchor="t" lIns="0" rIns="0" tIns="0" bIns="0">
-            <a:spAutoFit/>
-          </a:bodyPr>
-          <a:lstStyle/>
-          <a:p>
-            <a:pPr algn="l"/>
-            <a:r>
-              <a:rPr sz="1000" b="1" i="0">
-                <a:solidFill>
-                  <a:srgbClr val="8F989D"/>
-                </a:solidFill>
-                <a:latin typeface="Calibri"/>
-              </a:rPr>
-              <a:t>Inicio 5:10 pm</a:t>
-            </a:r>
-          </a:p>
-        </p:txBody>
-      </p:sp>
-      <p:sp>
-        <p:nvSpPr>
-          <p:cNvPr id="11" name="TextBox 10"/>
-          <p:cNvSpPr txBox="1"/>
-          <p:nvPr/>
-        </p:nvSpPr>
-        <p:spPr>
-          <a:xfrm>
             <a:off x="11094415" y="6446520"/>
             <a:ext cx="548640" cy="274320"/>
           </a:xfrm>
@@ -14584,41 +13814,6 @@
         </p:nvSpPr>
         <p:spPr>
           <a:xfrm>
-            <a:off x="2194560" y="6446520"/>
-            <a:ext cx="5943600" cy="274320"/>
-          </a:xfrm>
-          <a:prstGeom prst="rect">
-            <a:avLst/>
-          </a:prstGeom>
-          <a:noFill/>
-        </p:spPr>
-        <p:txBody>
-          <a:bodyPr wrap="square" anchor="t" lIns="0" rIns="0" tIns="0" bIns="0">
-            <a:spAutoFit/>
-          </a:bodyPr>
-          <a:lstStyle/>
-          <a:p>
-            <a:pPr algn="l"/>
-            <a:r>
-              <a:rPr sz="1000" b="1" i="0">
-                <a:solidFill>
-                  <a:srgbClr val="8F989D"/>
-                </a:solidFill>
-                <a:latin typeface="Calibri"/>
-              </a:rPr>
-              <a:t>Inicio 5:10 pm</a:t>
-            </a:r>
-          </a:p>
-        </p:txBody>
-      </p:sp>
-      <p:sp>
-        <p:nvSpPr>
-          <p:cNvPr id="13" name="TextBox 12"/>
-          <p:cNvSpPr txBox="1"/>
-          <p:nvPr/>
-        </p:nvSpPr>
-        <p:spPr>
-          <a:xfrm>
             <a:off x="11094415" y="6446520"/>
             <a:ext cx="548640" cy="274320"/>
           </a:xfrm>
@@ -15137,41 +14332,6 @@
       <p:sp>
         <p:nvSpPr>
           <p:cNvPr id="5" name="TextBox 4"/>
-          <p:cNvSpPr txBox="1"/>
-          <p:nvPr/>
-        </p:nvSpPr>
-        <p:spPr>
-          <a:xfrm>
-            <a:off x="2194560" y="6446520"/>
-            <a:ext cx="5943600" cy="274320"/>
-          </a:xfrm>
-          <a:prstGeom prst="rect">
-            <a:avLst/>
-          </a:prstGeom>
-          <a:noFill/>
-        </p:spPr>
-        <p:txBody>
-          <a:bodyPr wrap="square" anchor="t" lIns="0" rIns="0" tIns="0" bIns="0">
-            <a:spAutoFit/>
-          </a:bodyPr>
-          <a:lstStyle/>
-          <a:p>
-            <a:pPr algn="l"/>
-            <a:r>
-              <a:rPr sz="1000" b="1" i="0">
-                <a:solidFill>
-                  <a:srgbClr val="8F989D"/>
-                </a:solidFill>
-                <a:latin typeface="Calibri"/>
-              </a:rPr>
-              <a:t>Inicio 5:10 pm</a:t>
-            </a:r>
-          </a:p>
-        </p:txBody>
-      </p:sp>
-      <p:sp>
-        <p:nvSpPr>
-          <p:cNvPr id="6" name="TextBox 5"/>
           <p:cNvSpPr txBox="1"/>
           <p:nvPr/>
         </p:nvSpPr>

--- a/Pregrado/Trabajo de grado 3/Clases/Sesion 10 - Resumen, palabras clave UNESCO, conclusiones y referencias/Presentacion.pptx
+++ b/Pregrado/Trabajo de grado 3/Clases/Sesion 10 - Resumen, palabras clave UNESCO, conclusiones y referencias/Presentacion.pptx
@@ -29,6 +29,7 @@
     <p:sldId id="277" r:id="rId28"/>
     <p:sldId id="278" r:id="rId29"/>
     <p:sldId id="279" r:id="rId30"/>
+    <p:sldId id="280" r:id="rId31"/>
   </p:sldIdLst>
   <p:sldSz cx="12191695" cy="6858000" type="screen4x3"/>
   <p:notesSz cx="6858000" cy="9144000"/>
@@ -7045,7 +7046,7 @@
                 </a:solidFill>
                 <a:latin typeface="Calibri"/>
               </a:rPr>
-              <a:t>: solo cuando existe el resultado se sabe qué resumir. Adelantarlo produce un resumen que promete lo que el artículo no cumple.</a:t>
+              <a:t>: solo cuando existe el resultado se sabe qué resumir. Adelantarlo produce un resumen que promete lo que el documento no cumple.</a:t>
             </a:r>
           </a:p>
         </p:txBody>
@@ -7251,7 +7252,7 @@
                 </a:solidFill>
                 <a:latin typeface="Calibri"/>
               </a:rPr>
-              <a:t> y verifíquelas en Scholar. Son vocabulario controlado para que el artículo sea </a:t>
+              <a:t> y verifíquelas en Scholar. Son vocabulario controlado para que el documento sea </a:t>
             </a:r>
             <a:r>
               <a:rPr sz="1300" b="1" i="0">
@@ -7961,7 +7962,7 @@
                 </a:solidFill>
                 <a:latin typeface="Calibri"/>
               </a:rPr>
-              <a:t>TALLER — Cierre del artículo (20 minutos)</a:t>
+              <a:t>TALLER · Cierre del documento</a:t>
             </a:r>
           </a:p>
         </p:txBody>
@@ -7974,8 +7975,8 @@
         </p:nvSpPr>
         <p:spPr>
           <a:xfrm>
-            <a:off x="640080" y="1691639"/>
-            <a:ext cx="10911535" cy="4617720"/>
+            <a:off x="640080" y="1280160"/>
+            <a:ext cx="10911535" cy="411480"/>
           </a:xfrm>
           <a:prstGeom prst="rect">
             <a:avLst/>
@@ -7988,6 +7989,41 @@
           </a:bodyPr>
           <a:lstStyle/>
           <a:p>
+            <a:pPr algn="ctr"/>
+            <a:r>
+              <a:rPr sz="1500" b="0" i="0">
+                <a:solidFill>
+                  <a:srgbClr val="2B2B2B"/>
+                </a:solidFill>
+                <a:latin typeface="Calibri"/>
+              </a:rPr>
+              <a:t>Individual · el Docente acompaña y revisa resúmenes en voz alta</a:t>
+            </a:r>
+          </a:p>
+        </p:txBody>
+      </p:sp>
+      <p:sp>
+        <p:nvSpPr>
+          <p:cNvPr id="5" name="TextBox 4"/>
+          <p:cNvSpPr txBox="1"/>
+          <p:nvPr/>
+        </p:nvSpPr>
+        <p:spPr>
+          <a:xfrm>
+            <a:off x="640080" y="2011679"/>
+            <a:ext cx="10911535" cy="4297680"/>
+          </a:xfrm>
+          <a:prstGeom prst="rect">
+            <a:avLst/>
+          </a:prstGeom>
+          <a:noFill/>
+        </p:spPr>
+        <p:txBody>
+          <a:bodyPr wrap="square" anchor="t" lIns="0" rIns="0" tIns="0" bIns="0">
+            <a:spAutoFit/>
+          </a:bodyPr>
+          <a:lstStyle/>
+          <a:p>
             <a:pPr>
               <a:spcAft>
                 <a:spcPts val="1000"/>
@@ -8009,7 +8045,7 @@
                 </a:solidFill>
                 <a:latin typeface="Calibri"/>
               </a:rPr>
-              <a:t>Consigna literal.</a:t>
+              <a:t>Al final tiene:</a:t>
             </a:r>
             <a:r>
               <a:rPr sz="1600" b="0" i="0">
@@ -8018,269 +8054,7 @@
                 </a:solidFill>
                 <a:latin typeface="Calibri"/>
               </a:rPr>
-              <a:t> En un documento llamado </a:t>
-            </a:r>
-            <a:r>
-              <a:rPr sz="1600" b="1" i="0">
-                <a:solidFill>
-                  <a:srgbClr val="2B2B2B"/>
-                </a:solidFill>
-                <a:latin typeface="Calibri"/>
-              </a:rPr>
-              <a:t>S10_CierreArticulo_Apellido</a:t>
-            </a:r>
-            <a:r>
-              <a:rPr sz="1600" b="0" i="0">
-                <a:solidFill>
-                  <a:srgbClr val="2B2B2B"/>
-                </a:solidFill>
-                <a:latin typeface="Calibri"/>
-              </a:rPr>
-              <a:t>:</a:t>
-            </a:r>
-          </a:p>
-          <a:p>
-            <a:pPr lvl="1">
-              <a:spcAft>
-                <a:spcPts val="600"/>
-              </a:spcAft>
-            </a:pPr>
-            <a:r>
-              <a:rPr sz="1500" b="0" i="0">
-                <a:solidFill>
-                  <a:srgbClr val="2B2B2B"/>
-                </a:solidFill>
-                <a:latin typeface="Calibri"/>
-              </a:rPr>
-              <a:t>●   </a:t>
-            </a:r>
-            <a:r>
-              <a:rPr sz="1500" b="1" i="0">
-                <a:solidFill>
-                  <a:srgbClr val="2B2B2B"/>
-                </a:solidFill>
-                <a:latin typeface="Calibri"/>
-              </a:rPr>
-              <a:t>(1)</a:t>
-            </a:r>
-            <a:r>
-              <a:rPr sz="1500" b="0" i="0">
-                <a:solidFill>
-                  <a:srgbClr val="2B2B2B"/>
-                </a:solidFill>
-                <a:latin typeface="Calibri"/>
-              </a:rPr>
-              <a:t> Escriba el </a:t>
-            </a:r>
-            <a:r>
-              <a:rPr sz="1500" b="1" i="0">
-                <a:solidFill>
-                  <a:srgbClr val="2B2B2B"/>
-                </a:solidFill>
-                <a:latin typeface="Calibri"/>
-              </a:rPr>
-              <a:t>resumen</a:t>
-            </a:r>
-            <a:r>
-              <a:rPr sz="1500" b="0" i="0">
-                <a:solidFill>
-                  <a:srgbClr val="2B2B2B"/>
-                </a:solidFill>
-                <a:latin typeface="Calibri"/>
-              </a:rPr>
-              <a:t> de su artículo, </a:t>
-            </a:r>
-            <a:r>
-              <a:rPr sz="1500" b="1" i="0">
-                <a:solidFill>
-                  <a:srgbClr val="2B2B2B"/>
-                </a:solidFill>
-                <a:latin typeface="Calibri"/>
-              </a:rPr>
-              <a:t>~200–250 palabras</a:t>
-            </a:r>
-            <a:r>
-              <a:rPr sz="1500" b="0" i="0">
-                <a:solidFill>
-                  <a:srgbClr val="2B2B2B"/>
-                </a:solidFill>
-                <a:latin typeface="Calibri"/>
-              </a:rPr>
-              <a:t>, con las cinco piezas en orden. Anote al final el conteo real de palabras.</a:t>
-            </a:r>
-          </a:p>
-          <a:p>
-            <a:pPr lvl="1">
-              <a:spcAft>
-                <a:spcPts val="600"/>
-              </a:spcAft>
-            </a:pPr>
-            <a:r>
-              <a:rPr sz="1500" b="0" i="0">
-                <a:solidFill>
-                  <a:srgbClr val="2B2B2B"/>
-                </a:solidFill>
-                <a:latin typeface="Calibri"/>
-              </a:rPr>
-              <a:t>●   </a:t>
-            </a:r>
-            <a:r>
-              <a:rPr sz="1500" b="1" i="0">
-                <a:solidFill>
-                  <a:srgbClr val="2B2B2B"/>
-                </a:solidFill>
-                <a:latin typeface="Calibri"/>
-              </a:rPr>
-              <a:t>(2)</a:t>
-            </a:r>
-            <a:r>
-              <a:rPr sz="1500" b="0" i="0">
-                <a:solidFill>
-                  <a:srgbClr val="2B2B2B"/>
-                </a:solidFill>
-                <a:latin typeface="Calibri"/>
-              </a:rPr>
-              <a:t> Elija </a:t>
-            </a:r>
-            <a:r>
-              <a:rPr sz="1500" b="1" i="0">
-                <a:solidFill>
-                  <a:srgbClr val="2B2B2B"/>
-                </a:solidFill>
-                <a:latin typeface="Calibri"/>
-              </a:rPr>
-              <a:t>4 o 5 palabras clave</a:t>
-            </a:r>
-            <a:r>
-              <a:rPr sz="1500" b="0" i="0">
-                <a:solidFill>
-                  <a:srgbClr val="2B2B2B"/>
-                </a:solidFill>
-                <a:latin typeface="Calibri"/>
-              </a:rPr>
-              <a:t>, verificadas en el tesauro UNESCO y contrastadas en Scholar. Al lado de cada una, escriba cuántos resultados relevantes arrojó la búsqueda.</a:t>
-            </a:r>
-          </a:p>
-          <a:p>
-            <a:pPr lvl="1">
-              <a:spcAft>
-                <a:spcPts val="600"/>
-              </a:spcAft>
-            </a:pPr>
-            <a:r>
-              <a:rPr sz="1500" b="0" i="0">
-                <a:solidFill>
-                  <a:srgbClr val="2B2B2B"/>
-                </a:solidFill>
-                <a:latin typeface="Calibri"/>
-              </a:rPr>
-              <a:t>●   </a:t>
-            </a:r>
-            <a:r>
-              <a:rPr sz="1500" b="1" i="0">
-                <a:solidFill>
-                  <a:srgbClr val="2B2B2B"/>
-                </a:solidFill>
-                <a:latin typeface="Calibri"/>
-              </a:rPr>
-              <a:t>(3)</a:t>
-            </a:r>
-            <a:r>
-              <a:rPr sz="1500" b="0" i="0">
-                <a:solidFill>
-                  <a:srgbClr val="2B2B2B"/>
-                </a:solidFill>
-                <a:latin typeface="Calibri"/>
-              </a:rPr>
-              <a:t> Redacte las </a:t>
-            </a:r>
-            <a:r>
-              <a:rPr sz="1500" b="1" i="0">
-                <a:solidFill>
-                  <a:srgbClr val="2B2B2B"/>
-                </a:solidFill>
-                <a:latin typeface="Calibri"/>
-              </a:rPr>
-              <a:t>conclusiones</a:t>
-            </a:r>
-            <a:r>
-              <a:rPr sz="1500" b="0" i="0">
-                <a:solidFill>
-                  <a:srgbClr val="2B2B2B"/>
-                </a:solidFill>
-                <a:latin typeface="Calibri"/>
-              </a:rPr>
-              <a:t> con las cuatro piezas: respuesta a la pregunta, cumplimiento de objetivos, limitaciones y trabajo futuro.</a:t>
-            </a:r>
-          </a:p>
-          <a:p>
-            <a:pPr lvl="1">
-              <a:spcAft>
-                <a:spcPts val="600"/>
-              </a:spcAft>
-            </a:pPr>
-            <a:r>
-              <a:rPr sz="1500" b="0" i="0">
-                <a:solidFill>
-                  <a:srgbClr val="2B2B2B"/>
-                </a:solidFill>
-                <a:latin typeface="Calibri"/>
-              </a:rPr>
-              <a:t>●   </a:t>
-            </a:r>
-            <a:r>
-              <a:rPr sz="1500" b="1" i="0">
-                <a:solidFill>
-                  <a:srgbClr val="2B2B2B"/>
-                </a:solidFill>
-                <a:latin typeface="Calibri"/>
-              </a:rPr>
-              <a:t>(4)</a:t>
-            </a:r>
-            <a:r>
-              <a:rPr sz="1500" b="0" i="0">
-                <a:solidFill>
-                  <a:srgbClr val="2B2B2B"/>
-                </a:solidFill>
-                <a:latin typeface="Calibri"/>
-              </a:rPr>
-              <a:t> Revise sus </a:t>
-            </a:r>
-            <a:r>
-              <a:rPr sz="1500" b="1" i="0">
-                <a:solidFill>
-                  <a:srgbClr val="2B2B2B"/>
-                </a:solidFill>
-                <a:latin typeface="Calibri"/>
-              </a:rPr>
-              <a:t>referencias</a:t>
-            </a:r>
-            <a:r>
-              <a:rPr sz="1500" b="0" i="0">
-                <a:solidFill>
-                  <a:srgbClr val="2B2B2B"/>
-                </a:solidFill>
-                <a:latin typeface="Calibri"/>
-              </a:rPr>
-              <a:t> en ZoteroBib: conteo de fuentes, estilo APA 7, orden alfabético y </a:t>
-            </a:r>
-            <a:r>
-              <a:rPr sz="1500" b="1" i="0">
-                <a:solidFill>
-                  <a:srgbClr val="2B2B2B"/>
-                </a:solidFill>
-                <a:latin typeface="Calibri"/>
-              </a:rPr>
-              <a:t>auditoría anti-huérfanas</a:t>
-            </a:r>
-            <a:r>
-              <a:rPr sz="1500" b="0" i="0">
-                <a:solidFill>
-                  <a:srgbClr val="2B2B2B"/>
-                </a:solidFill>
-                <a:latin typeface="Calibri"/>
-              </a:rPr>
-              <a:t> en las dos direcciones.</a:t>
+              <a:t> el resumen, las palabras clave verificadas, las conclusiones y las referencias auditadas.</a:t>
             </a:r>
           </a:p>
           <a:p>
@@ -8305,7 +8079,7 @@
                 </a:solidFill>
                 <a:latin typeface="Calibri"/>
               </a:rPr>
-              <a:t>Tiempo:</a:t>
+              <a:t>Paso 1</a:t>
             </a:r>
             <a:r>
               <a:rPr sz="1600" b="0" i="0">
@@ -8314,14 +8088,276 @@
                 </a:solidFill>
                 <a:latin typeface="Calibri"/>
               </a:rPr>
-              <a:t> 20 minutos. El Docente acompaña y revisa resúmenes en voz alta.</a:t>
-            </a:r>
-          </a:p>
-        </p:txBody>
-      </p:sp>
-      <p:sp>
-        <p:nvSpPr>
-          <p:cNvPr id="5" name="TextBox 4"/>
+              <a:t> · Escriba el </a:t>
+            </a:r>
+            <a:r>
+              <a:rPr sz="1600" b="1" i="0">
+                <a:solidFill>
+                  <a:srgbClr val="2B2B2B"/>
+                </a:solidFill>
+                <a:latin typeface="Calibri"/>
+              </a:rPr>
+              <a:t>resumen</a:t>
+            </a:r>
+            <a:r>
+              <a:rPr sz="1600" b="0" i="0">
+                <a:solidFill>
+                  <a:srgbClr val="2B2B2B"/>
+                </a:solidFill>
+                <a:latin typeface="Calibri"/>
+              </a:rPr>
+              <a:t>, </a:t>
+            </a:r>
+            <a:r>
+              <a:rPr sz="1600" b="1" i="0">
+                <a:solidFill>
+                  <a:srgbClr val="2B2B2B"/>
+                </a:solidFill>
+                <a:latin typeface="Calibri"/>
+              </a:rPr>
+              <a:t>~200–250 palabras</a:t>
+            </a:r>
+            <a:r>
+              <a:rPr sz="1600" b="0" i="0">
+                <a:solidFill>
+                  <a:srgbClr val="2B2B2B"/>
+                </a:solidFill>
+                <a:latin typeface="Calibri"/>
+              </a:rPr>
+              <a:t>, con las cinco piezas en orden. Anote al final el conteo real de palabras.</a:t>
+            </a:r>
+          </a:p>
+          <a:p>
+            <a:pPr>
+              <a:spcAft>
+                <a:spcPts val="1000"/>
+              </a:spcAft>
+            </a:pPr>
+            <a:r>
+              <a:rPr sz="1600" b="0" i="0">
+                <a:solidFill>
+                  <a:srgbClr val="2B2B2B"/>
+                </a:solidFill>
+                <a:latin typeface="Calibri"/>
+              </a:rPr>
+              <a:t>–   </a:t>
+            </a:r>
+            <a:r>
+              <a:rPr sz="1600" b="1" i="0">
+                <a:solidFill>
+                  <a:srgbClr val="2B2B2B"/>
+                </a:solidFill>
+                <a:latin typeface="Calibri"/>
+              </a:rPr>
+              <a:t>Paso 2</a:t>
+            </a:r>
+            <a:r>
+              <a:rPr sz="1600" b="0" i="0">
+                <a:solidFill>
+                  <a:srgbClr val="2B2B2B"/>
+                </a:solidFill>
+                <a:latin typeface="Calibri"/>
+              </a:rPr>
+              <a:t> · Elija </a:t>
+            </a:r>
+            <a:r>
+              <a:rPr sz="1600" b="1" i="0">
+                <a:solidFill>
+                  <a:srgbClr val="2B2B2B"/>
+                </a:solidFill>
+                <a:latin typeface="Calibri"/>
+              </a:rPr>
+              <a:t>4 o 5 palabras clave</a:t>
+            </a:r>
+            <a:r>
+              <a:rPr sz="1600" b="0" i="0">
+                <a:solidFill>
+                  <a:srgbClr val="2B2B2B"/>
+                </a:solidFill>
+                <a:latin typeface="Calibri"/>
+              </a:rPr>
+              <a:t>, verificadas en el tesauro UNESCO y contrastadas en Scholar; anote al lado cuántos resultados relevantes arrojó cada una.</a:t>
+            </a:r>
+          </a:p>
+          <a:p>
+            <a:pPr>
+              <a:spcAft>
+                <a:spcPts val="1000"/>
+              </a:spcAft>
+            </a:pPr>
+            <a:r>
+              <a:rPr sz="1600" b="0" i="0">
+                <a:solidFill>
+                  <a:srgbClr val="2B2B2B"/>
+                </a:solidFill>
+                <a:latin typeface="Calibri"/>
+              </a:rPr>
+              <a:t>–   </a:t>
+            </a:r>
+            <a:r>
+              <a:rPr sz="1600" b="1" i="0">
+                <a:solidFill>
+                  <a:srgbClr val="2B2B2B"/>
+                </a:solidFill>
+                <a:latin typeface="Calibri"/>
+              </a:rPr>
+              <a:t>Paso 3</a:t>
+            </a:r>
+            <a:r>
+              <a:rPr sz="1600" b="0" i="0">
+                <a:solidFill>
+                  <a:srgbClr val="2B2B2B"/>
+                </a:solidFill>
+                <a:latin typeface="Calibri"/>
+              </a:rPr>
+              <a:t> · Redacte las </a:t>
+            </a:r>
+            <a:r>
+              <a:rPr sz="1600" b="1" i="0">
+                <a:solidFill>
+                  <a:srgbClr val="2B2B2B"/>
+                </a:solidFill>
+                <a:latin typeface="Calibri"/>
+              </a:rPr>
+              <a:t>conclusiones</a:t>
+            </a:r>
+            <a:r>
+              <a:rPr sz="1600" b="0" i="0">
+                <a:solidFill>
+                  <a:srgbClr val="2B2B2B"/>
+                </a:solidFill>
+                <a:latin typeface="Calibri"/>
+              </a:rPr>
+              <a:t> con las cuatro piezas: respuesta a la pregunta, cumplimiento de objetivos, limitaciones y trabajo futuro.</a:t>
+            </a:r>
+          </a:p>
+          <a:p>
+            <a:pPr>
+              <a:spcAft>
+                <a:spcPts val="1000"/>
+              </a:spcAft>
+            </a:pPr>
+            <a:r>
+              <a:rPr sz="1600" b="0" i="0">
+                <a:solidFill>
+                  <a:srgbClr val="2B2B2B"/>
+                </a:solidFill>
+                <a:latin typeface="Calibri"/>
+              </a:rPr>
+              <a:t>–   </a:t>
+            </a:r>
+            <a:r>
+              <a:rPr sz="1600" b="1" i="0">
+                <a:solidFill>
+                  <a:srgbClr val="2B2B2B"/>
+                </a:solidFill>
+                <a:latin typeface="Calibri"/>
+              </a:rPr>
+              <a:t>Paso 4</a:t>
+            </a:r>
+            <a:r>
+              <a:rPr sz="1600" b="0" i="0">
+                <a:solidFill>
+                  <a:srgbClr val="2B2B2B"/>
+                </a:solidFill>
+                <a:latin typeface="Calibri"/>
+              </a:rPr>
+              <a:t> · Revise sus </a:t>
+            </a:r>
+            <a:r>
+              <a:rPr sz="1600" b="1" i="0">
+                <a:solidFill>
+                  <a:srgbClr val="2B2B2B"/>
+                </a:solidFill>
+                <a:latin typeface="Calibri"/>
+              </a:rPr>
+              <a:t>referencias</a:t>
+            </a:r>
+            <a:r>
+              <a:rPr sz="1600" b="0" i="0">
+                <a:solidFill>
+                  <a:srgbClr val="2B2B2B"/>
+                </a:solidFill>
+                <a:latin typeface="Calibri"/>
+              </a:rPr>
+              <a:t> en ZoteroBib: conteo, estilo APA 7, orden alfabético y </a:t>
+            </a:r>
+            <a:r>
+              <a:rPr sz="1600" b="1" i="0">
+                <a:solidFill>
+                  <a:srgbClr val="2B2B2B"/>
+                </a:solidFill>
+                <a:latin typeface="Calibri"/>
+              </a:rPr>
+              <a:t>auditoría anti-huérfanas en las dos direcciones</a:t>
+            </a:r>
+            <a:r>
+              <a:rPr sz="1600" b="0" i="0">
+                <a:solidFill>
+                  <a:srgbClr val="2B2B2B"/>
+                </a:solidFill>
+                <a:latin typeface="Calibri"/>
+              </a:rPr>
+              <a:t>.</a:t>
+            </a:r>
+          </a:p>
+          <a:p>
+            <a:pPr>
+              <a:spcAft>
+                <a:spcPts val="1000"/>
+              </a:spcAft>
+            </a:pPr>
+            <a:r>
+              <a:rPr sz="1600" b="0" i="0">
+                <a:solidFill>
+                  <a:srgbClr val="2B2B2B"/>
+                </a:solidFill>
+                <a:latin typeface="Calibri"/>
+              </a:rPr>
+              <a:t>–   </a:t>
+            </a:r>
+            <a:r>
+              <a:rPr sz="1600" b="1" i="0">
+                <a:solidFill>
+                  <a:srgbClr val="2B2B2B"/>
+                </a:solidFill>
+                <a:latin typeface="Calibri"/>
+              </a:rPr>
+              <a:t>En clase, sin falta:</a:t>
+            </a:r>
+            <a:r>
+              <a:rPr sz="1600" b="0" i="0">
+                <a:solidFill>
+                  <a:srgbClr val="2B2B2B"/>
+                </a:solidFill>
+                <a:latin typeface="Calibri"/>
+              </a:rPr>
+              <a:t> los </a:t>
+            </a:r>
+            <a:r>
+              <a:rPr sz="1600" b="1" i="0">
+                <a:solidFill>
+                  <a:srgbClr val="2B2B2B"/>
+                </a:solidFill>
+                <a:latin typeface="Calibri"/>
+              </a:rPr>
+              <a:t>pasos 1 a 2</a:t>
+            </a:r>
+            <a:r>
+              <a:rPr sz="1600" b="0" i="0">
+                <a:solidFill>
+                  <a:srgbClr val="2B2B2B"/>
+                </a:solidFill>
+                <a:latin typeface="Calibri"/>
+              </a:rPr>
+              <a:t>. Del 3 en adelante puede quedar en trabajo autónomo, pero antes de la próxima sesión.</a:t>
+            </a:r>
+          </a:p>
+        </p:txBody>
+      </p:sp>
+      <p:sp>
+        <p:nvSpPr>
+          <p:cNvPr id="6" name="TextBox 5"/>
           <p:cNvSpPr txBox="1"/>
           <p:nvPr/>
         </p:nvSpPr>
@@ -8493,7 +8529,7 @@
                 </a:solidFill>
                 <a:latin typeface="Calibri"/>
               </a:rPr>
-              <a:t>–   El cuerpo del artículo ya está. Falta lo que el lector ve </a:t>
+              <a:t>–   El cuerpo del documento ya está. Falta lo que el lector ve </a:t>
             </a:r>
             <a:r>
               <a:rPr sz="1600" b="1" i="0">
@@ -8545,7 +8581,7 @@
                 </a:solidFill>
                 <a:latin typeface="Calibri"/>
               </a:rPr>
-              <a:t>–   Orden real de lectura de un evaluador o de un investigador que encuentra su artículo:</a:t>
+              <a:t>–   Orden real de lectura de un evaluador o de un investigador que encuentra su documento:</a:t>
             </a:r>
           </a:p>
           <a:p>
@@ -8789,7 +8825,7 @@
                 </a:solidFill>
                 <a:latin typeface="Calibri"/>
               </a:rPr>
-              <a:t> están mal elegidas, el artículo simplemente </a:t>
+              <a:t> están mal elegidas, el documento simplemente </a:t>
             </a:r>
             <a:r>
               <a:rPr sz="1600" b="1" i="0">
@@ -9014,7 +9050,7 @@
                 </a:solidFill>
                 <a:latin typeface="Calibri"/>
               </a:rPr>
-              <a:t>Requisito de hoy: tener el artículo completo abierto. No se puede resumir lo que todavía no existe.</a:t>
+              <a:t>Requisito de hoy: tener el documento completo abierto. No se puede resumir lo que todavía no existe.</a:t>
             </a:r>
           </a:p>
         </p:txBody>
@@ -9119,7 +9155,7 @@
                 </a:solidFill>
                 <a:latin typeface="Calibri"/>
               </a:rPr>
-              <a:t>TALLER — Cierre del artículo (20 minutos) (cont.)</a:t>
+              <a:t>TALLER · cómo se revisa y dónde se entrega</a:t>
             </a:r>
           </a:p>
         </p:txBody>
@@ -9132,8 +9168,8 @@
         </p:nvSpPr>
         <p:spPr>
           <a:xfrm>
-            <a:off x="640080" y="1691639"/>
-            <a:ext cx="10911535" cy="4617720"/>
+            <a:off x="640080" y="1280160"/>
+            <a:ext cx="10911535" cy="411480"/>
           </a:xfrm>
           <a:prstGeom prst="rect">
             <a:avLst/>
@@ -9146,6 +9182,41 @@
           </a:bodyPr>
           <a:lstStyle/>
           <a:p>
+            <a:pPr algn="ctr"/>
+            <a:r>
+              <a:rPr sz="1500" b="0" i="0">
+                <a:solidFill>
+                  <a:srgbClr val="2B2B2B"/>
+                </a:solidFill>
+                <a:latin typeface="Calibri"/>
+              </a:rPr>
+              <a:t>Cierre del documento</a:t>
+            </a:r>
+          </a:p>
+        </p:txBody>
+      </p:sp>
+      <p:sp>
+        <p:nvSpPr>
+          <p:cNvPr id="5" name="TextBox 4"/>
+          <p:cNvSpPr txBox="1"/>
+          <p:nvPr/>
+        </p:nvSpPr>
+        <p:spPr>
+          <a:xfrm>
+            <a:off x="640080" y="2011679"/>
+            <a:ext cx="10911535" cy="4297680"/>
+          </a:xfrm>
+          <a:prstGeom prst="rect">
+            <a:avLst/>
+          </a:prstGeom>
+          <a:noFill/>
+        </p:spPr>
+        <p:txBody>
+          <a:bodyPr wrap="square" anchor="t" lIns="0" rIns="0" tIns="0" bIns="0">
+            <a:spAutoFit/>
+          </a:bodyPr>
+          <a:lstStyle/>
+          <a:p>
             <a:pPr>
               <a:spcAft>
                 <a:spcPts val="1000"/>
@@ -9167,7 +9238,16 @@
                 </a:solidFill>
                 <a:latin typeface="Calibri"/>
               </a:rPr>
-              <a:t>Criterio de éxito (verificable):</a:t>
+              <a:t>Quedó bien si</a:t>
+            </a:r>
+            <a:r>
+              <a:rPr sz="1600" b="0" i="0">
+                <a:solidFill>
+                  <a:srgbClr val="2B2B2B"/>
+                </a:solidFill>
+                <a:latin typeface="Calibri"/>
+              </a:rPr>
+              <a:t> —compruébelo usted antes de cerrar el documento—:</a:t>
             </a:r>
           </a:p>
           <a:p>
@@ -9192,7 +9272,7 @@
                 </a:solidFill>
                 <a:latin typeface="Calibri"/>
               </a:rPr>
-              <a:t>se entiende sin leer el artículo</a:t>
+              <a:t>se entiende sin leer el documento</a:t>
             </a:r>
             <a:r>
               <a:rPr sz="1500" b="0" i="0">
@@ -9217,7 +9297,25 @@
                 </a:solidFill>
                 <a:latin typeface="Calibri"/>
               </a:rPr>
-              <a:t>●   Las palabras clave existen como términos reales y arrojan resultados pertinentes en Scholar.</a:t>
+              <a:t>●   Las palabras clave existen como </a:t>
+            </a:r>
+            <a:r>
+              <a:rPr sz="1500" b="1" i="0">
+                <a:solidFill>
+                  <a:srgbClr val="2B2B2B"/>
+                </a:solidFill>
+                <a:latin typeface="Calibri"/>
+              </a:rPr>
+              <a:t>términos reales</a:t>
+            </a:r>
+            <a:r>
+              <a:rPr sz="1500" b="0" i="0">
+                <a:solidFill>
+                  <a:srgbClr val="2B2B2B"/>
+                </a:solidFill>
+                <a:latin typeface="Calibri"/>
+              </a:rPr>
+              <a:t> y arrojan resultados pertinentes en Scholar.</a:t>
             </a:r>
           </a:p>
           <a:p>
@@ -9251,7 +9349,7 @@
                 </a:solidFill>
                 <a:latin typeface="Calibri"/>
               </a:rPr>
-              <a:t> de investigación, no repiten datos.</a:t>
+              <a:t>, no repiten datos.</a:t>
             </a:r>
           </a:p>
           <a:p>
@@ -9288,11 +9386,203 @@
               <a:t>: cada apellido de la lista aparece en el cuerpo y viceversa.</a:t>
             </a:r>
           </a:p>
-        </p:txBody>
-      </p:sp>
-      <p:sp>
-        <p:nvSpPr>
-          <p:cNvPr id="5" name="TextBox 4"/>
+          <a:p>
+            <a:pPr>
+              <a:spcAft>
+                <a:spcPts val="1000"/>
+              </a:spcAft>
+            </a:pPr>
+            <a:r>
+              <a:rPr sz="1600" b="0" i="0">
+                <a:solidFill>
+                  <a:srgbClr val="2B2B2B"/>
+                </a:solidFill>
+                <a:latin typeface="Calibri"/>
+              </a:rPr>
+              <a:t>–   </a:t>
+            </a:r>
+            <a:r>
+              <a:rPr sz="1600" b="1" i="0">
+                <a:solidFill>
+                  <a:srgbClr val="2B2B2B"/>
+                </a:solidFill>
+                <a:latin typeface="Calibri"/>
+              </a:rPr>
+              <a:t>Plan B:</a:t>
+            </a:r>
+            <a:r>
+              <a:rPr sz="1600" b="0" i="0">
+                <a:solidFill>
+                  <a:srgbClr val="2B2B2B"/>
+                </a:solidFill>
+                <a:latin typeface="Calibri"/>
+              </a:rPr>
+              <a:t> Control en pareja: intercambien resúmenes. Si su compañero no puede decir qué hizo usted y qué encontró, el resumen todavía no está listo.</a:t>
+            </a:r>
+          </a:p>
+          <a:p>
+            <a:pPr>
+              <a:spcAft>
+                <a:spcPts val="1000"/>
+              </a:spcAft>
+            </a:pPr>
+            <a:r>
+              <a:rPr sz="1600" b="0" i="0">
+                <a:solidFill>
+                  <a:srgbClr val="2B2B2B"/>
+                </a:solidFill>
+                <a:latin typeface="Calibri"/>
+              </a:rPr>
+              <a:t>–   </a:t>
+            </a:r>
+            <a:r>
+              <a:rPr sz="1600" b="1" i="0">
+                <a:solidFill>
+                  <a:srgbClr val="2B2B2B"/>
+                </a:solidFill>
+                <a:latin typeface="Calibri"/>
+              </a:rPr>
+              <a:t>Hoy no se sube nada al aula:</a:t>
+            </a:r>
+            <a:r>
+              <a:rPr sz="1600" b="0" i="0">
+                <a:solidFill>
+                  <a:srgbClr val="2B2B2B"/>
+                </a:solidFill>
+                <a:latin typeface="Calibri"/>
+              </a:rPr>
+              <a:t> guarde `S10_CierreArticulo_Apellido` (Google Doc o PDF) en su Drive y tráigalo a la próxima sesión. Es un </a:t>
+            </a:r>
+            <a:r>
+              <a:rPr sz="1600" b="1" i="0">
+                <a:solidFill>
+                  <a:srgbClr val="2B2B2B"/>
+                </a:solidFill>
+                <a:latin typeface="Calibri"/>
+              </a:rPr>
+              <a:t>avance formativo</a:t>
+            </a:r>
+            <a:r>
+              <a:rPr sz="1600" b="0" i="0">
+                <a:solidFill>
+                  <a:srgbClr val="2B2B2B"/>
+                </a:solidFill>
+                <a:latin typeface="Calibri"/>
+              </a:rPr>
+              <a:t>, se revisa en clase.</a:t>
+            </a:r>
+          </a:p>
+          <a:p>
+            <a:pPr>
+              <a:spcAft>
+                <a:spcPts val="1000"/>
+              </a:spcAft>
+            </a:pPr>
+            <a:r>
+              <a:rPr sz="1600" b="0" i="0">
+                <a:solidFill>
+                  <a:srgbClr val="2B2B2B"/>
+                </a:solidFill>
+                <a:latin typeface="Calibri"/>
+              </a:rPr>
+              <a:t>–   </a:t>
+            </a:r>
+            <a:r>
+              <a:rPr sz="1600" b="1" i="0">
+                <a:solidFill>
+                  <a:srgbClr val="2B2B2B"/>
+                </a:solidFill>
+                <a:latin typeface="Calibri"/>
+              </a:rPr>
+              <a:t>Esto alimenta:</a:t>
+            </a:r>
+            <a:r>
+              <a:rPr sz="1600" b="0" i="0">
+                <a:solidFill>
+                  <a:srgbClr val="2B2B2B"/>
+                </a:solidFill>
+                <a:latin typeface="Calibri"/>
+              </a:rPr>
+              <a:t> </a:t>
+            </a:r>
+            <a:r>
+              <a:rPr sz="1600" b="1" i="0">
+                <a:solidFill>
+                  <a:srgbClr val="2B2B2B"/>
+                </a:solidFill>
+                <a:latin typeface="Calibri"/>
+              </a:rPr>
+              <a:t>ACA Final</a:t>
+            </a:r>
+            <a:r>
+              <a:rPr sz="1600" b="0" i="0">
+                <a:solidFill>
+                  <a:srgbClr val="2B2B2B"/>
+                </a:solidFill>
+                <a:latin typeface="Calibri"/>
+              </a:rPr>
+              <a:t> —tarea, 32%—, el documento que </a:t>
+            </a:r>
+            <a:r>
+              <a:rPr sz="1600" b="1" i="0">
+                <a:solidFill>
+                  <a:srgbClr val="2B2B2B"/>
+                </a:solidFill>
+                <a:latin typeface="Calibri"/>
+              </a:rPr>
+              <a:t>sí</a:t>
+            </a:r>
+            <a:r>
+              <a:rPr sz="1600" b="0" i="0">
+                <a:solidFill>
+                  <a:srgbClr val="2B2B2B"/>
+                </a:solidFill>
+                <a:latin typeface="Calibri"/>
+              </a:rPr>
+              <a:t> recibe </a:t>
+            </a:r>
+            <a:r>
+              <a:rPr sz="1600" b="1" i="0">
+                <a:solidFill>
+                  <a:srgbClr val="2B2B2B"/>
+                </a:solidFill>
+                <a:latin typeface="Calibri"/>
+              </a:rPr>
+              <a:t>el aula de su grupo</a:t>
+            </a:r>
+            <a:r>
+              <a:rPr sz="1600" b="0" i="0">
+                <a:solidFill>
+                  <a:srgbClr val="2B2B2B"/>
+                </a:solidFill>
+                <a:latin typeface="Calibri"/>
+              </a:rPr>
+              <a:t> en CDigital; cierra en la semana de la </a:t>
+            </a:r>
+            <a:r>
+              <a:rPr sz="1600" b="1" i="0">
+                <a:solidFill>
+                  <a:srgbClr val="2B2B2B"/>
+                </a:solidFill>
+                <a:latin typeface="Calibri"/>
+              </a:rPr>
+              <a:t>Sesión 13</a:t>
+            </a:r>
+            <a:r>
+              <a:rPr sz="1600" b="0" i="0">
+                <a:solidFill>
+                  <a:srgbClr val="2B2B2B"/>
+                </a:solidFill>
+                <a:latin typeface="Calibri"/>
+              </a:rPr>
+              <a:t>.</a:t>
+            </a:r>
+          </a:p>
+        </p:txBody>
+      </p:sp>
+      <p:sp>
+        <p:nvSpPr>
+          <p:cNvPr id="6" name="TextBox 5"/>
           <p:cNvSpPr txBox="1"/>
           <p:nvPr/>
         </p:nvSpPr>
@@ -9321,40 +9611,6 @@
                 <a:latin typeface="Calibri"/>
               </a:rPr>
               <a:t>20</a:t>
-            </a:r>
-          </a:p>
-        </p:txBody>
-      </p:sp>
-      <p:sp>
-        <p:nvSpPr>
-          <p:cNvPr id="6" name="TextBox 5"/>
-          <p:cNvSpPr txBox="1"/>
-          <p:nvPr/>
-        </p:nvSpPr>
-        <p:spPr>
-          <a:xfrm>
-            <a:off x="640080" y="5943600"/>
-            <a:ext cx="9997135" cy="457200"/>
-          </a:xfrm>
-          <a:prstGeom prst="rect">
-            <a:avLst/>
-          </a:prstGeom>
-          <a:noFill/>
-        </p:spPr>
-        <p:txBody>
-          <a:bodyPr wrap="square" anchor="t" lIns="0" rIns="0" tIns="0" bIns="0">
-            <a:spAutoFit/>
-          </a:bodyPr>
-          <a:lstStyle/>
-          <a:p>
-            <a:r>
-              <a:rPr sz="1200" b="0" i="1">
-                <a:solidFill>
-                  <a:srgbClr val="2B2B2B"/>
-                </a:solidFill>
-                <a:latin typeface="Calibri"/>
-              </a:rPr>
-              <a:t>Ejercicio de control en pareja: intercambien resúmenes. Si su compañero no puede decir qué hizo usted y qué encontró, el resumen todavía no está listo.</a:t>
             </a:r>
           </a:p>
         </p:txBody>
@@ -10631,7 +10887,25 @@
                 </a:solidFill>
                 <a:latin typeface="Calibri"/>
               </a:rPr>
-              <a:t> `S10_CierreArticulo_Apellido` a CDigital — [URL CDigital — campus del curso pendiente].</a:t>
+              <a:t> `S10_CierreArticulo_Apellido` a CDigital — el aula de </a:t>
+            </a:r>
+            <a:r>
+              <a:rPr sz="1600" b="1" i="0">
+                <a:solidFill>
+                  <a:srgbClr val="2B2B2B"/>
+                </a:solidFill>
+                <a:latin typeface="Calibri"/>
+              </a:rPr>
+              <a:t>su grupo</a:t>
+            </a:r>
+            <a:r>
+              <a:rPr sz="1600" b="0" i="0">
+                <a:solidFill>
+                  <a:srgbClr val="2B2B2B"/>
+                </a:solidFill>
+                <a:latin typeface="Calibri"/>
+              </a:rPr>
+              <a:t> en CDigital.</a:t>
             </a:r>
           </a:p>
           <a:p>
@@ -10656,7 +10930,7 @@
                 </a:solidFill>
                 <a:latin typeface="Calibri"/>
               </a:rPr>
-              <a:t>el artículo debería quedar completo</a:t>
+              <a:t>el documento debería quedar completo</a:t>
             </a:r>
             <a:r>
               <a:rPr sz="1600" b="0" i="0">
@@ -10699,7 +10973,7 @@
                 </a:solidFill>
                 <a:latin typeface="Calibri"/>
               </a:rPr>
-              <a:t> lea su artículo </a:t>
+              <a:t> lea su documento </a:t>
             </a:r>
             <a:r>
               <a:rPr sz="1600" b="1" i="0">
@@ -10853,7 +11127,7 @@
                 </a:solidFill>
                 <a:latin typeface="Calibri"/>
               </a:rPr>
-              <a:t>●   Traiga su artículo terminado y las </a:t>
+              <a:t>●   Traiga su documento terminado y las </a:t>
             </a:r>
             <a:r>
               <a:rPr sz="1500" b="1" i="0">
@@ -10920,6 +11194,1214 @@
 </file>
 
 <file path=ppt/slides/slide24.xml><?xml version="1.0" encoding="utf-8"?>
+<p:sld xmlns:a="http://schemas.openxmlformats.org/drawingml/2006/main" xmlns:p="http://schemas.openxmlformats.org/presentationml/2006/main" xmlns:r="http://schemas.openxmlformats.org/officeDocument/2006/relationships">
+  <p:cSld>
+    <p:bg>
+      <p:bgPr>
+        <a:solidFill>
+          <a:srgbClr val="FFFFFF"/>
+        </a:solidFill>
+        <a:effectLst/>
+      </p:bgPr>
+    </p:bg>
+    <p:spTree>
+      <p:nvGrpSpPr>
+        <p:cNvPr id="1" name=""/>
+        <p:cNvGrpSpPr/>
+        <p:nvPr/>
+      </p:nvGrpSpPr>
+      <p:grpSpPr/>
+      <p:sp>
+        <p:nvSpPr>
+          <p:cNvPr id="2" name="Rectangle 1"/>
+          <p:cNvSpPr/>
+          <p:nvPr/>
+        </p:nvSpPr>
+        <p:spPr>
+          <a:xfrm>
+            <a:off x="0" y="0"/>
+            <a:ext cx="12191695" cy="1188720"/>
+          </a:xfrm>
+          <a:prstGeom prst="rect">
+            <a:avLst/>
+          </a:prstGeom>
+          <a:solidFill>
+            <a:srgbClr val="0C2340"/>
+          </a:solidFill>
+          <a:ln>
+            <a:noFill/>
+          </a:ln>
+          <a:effectLst/>
+        </p:spPr>
+        <p:style>
+          <a:lnRef idx="1">
+            <a:schemeClr val="accent1"/>
+          </a:lnRef>
+          <a:fillRef idx="3">
+            <a:schemeClr val="accent1"/>
+          </a:fillRef>
+          <a:effectRef idx="2">
+            <a:schemeClr val="accent1"/>
+          </a:effectRef>
+          <a:fontRef idx="minor">
+            <a:schemeClr val="lt1"/>
+          </a:fontRef>
+        </p:style>
+        <p:txBody>
+          <a:bodyPr rtlCol="0" anchor="ctr"/>
+          <a:lstStyle/>
+          <a:p>
+            <a:pPr algn="ctr"/>
+          </a:p>
+        </p:txBody>
+      </p:sp>
+      <p:sp>
+        <p:nvSpPr>
+          <p:cNvPr id="3" name="TextBox 2"/>
+          <p:cNvSpPr txBox="1"/>
+          <p:nvPr/>
+        </p:nvSpPr>
+        <p:spPr>
+          <a:xfrm>
+            <a:off x="640080" y="0"/>
+            <a:ext cx="9082735" cy="1188720"/>
+          </a:xfrm>
+          <a:prstGeom prst="rect">
+            <a:avLst/>
+          </a:prstGeom>
+          <a:noFill/>
+        </p:spPr>
+        <p:txBody>
+          <a:bodyPr wrap="square" anchor="ctr" lIns="0" rIns="0" tIns="0" bIns="0">
+            <a:spAutoFit/>
+          </a:bodyPr>
+          <a:lstStyle/>
+          <a:p>
+            <a:pPr algn="ctr"/>
+            <a:r>
+              <a:rPr sz="2600" b="1" i="0">
+                <a:solidFill>
+                  <a:srgbClr val="FFFFFF"/>
+                </a:solidFill>
+                <a:latin typeface="Calibri"/>
+              </a:rPr>
+              <a:t>RUTA DE ENTREGABLES DEL CURSO</a:t>
+            </a:r>
+          </a:p>
+        </p:txBody>
+      </p:sp>
+      <p:sp>
+        <p:nvSpPr>
+          <p:cNvPr id="4" name="TextBox 3"/>
+          <p:cNvSpPr txBox="1"/>
+          <p:nvPr/>
+        </p:nvSpPr>
+        <p:spPr>
+          <a:xfrm>
+            <a:off x="640080" y="1280160"/>
+            <a:ext cx="10911535" cy="411480"/>
+          </a:xfrm>
+          <a:prstGeom prst="rect">
+            <a:avLst/>
+          </a:prstGeom>
+          <a:noFill/>
+        </p:spPr>
+        <p:txBody>
+          <a:bodyPr wrap="square" anchor="t" lIns="0" rIns="0" tIns="0" bIns="0">
+            <a:spAutoFit/>
+          </a:bodyPr>
+          <a:lstStyle/>
+          <a:p>
+            <a:pPr algn="ctr"/>
+            <a:r>
+              <a:rPr sz="1500" b="0" i="0">
+                <a:solidFill>
+                  <a:srgbClr val="2B2B2B"/>
+                </a:solidFill>
+                <a:latin typeface="Calibri"/>
+              </a:rPr>
+              <a:t>Sin fechas a propósito: aquí va </a:t>
+            </a:r>
+            <a:r>
+              <a:rPr sz="1500" b="1" i="0">
+                <a:solidFill>
+                  <a:srgbClr val="2B2B2B"/>
+                </a:solidFill>
+                <a:latin typeface="Calibri"/>
+              </a:rPr>
+              <a:t>en qué punto del curso</a:t>
+            </a:r>
+            <a:r>
+              <a:rPr sz="1500" b="0" i="0">
+                <a:solidFill>
+                  <a:srgbClr val="2B2B2B"/>
+                </a:solidFill>
+                <a:latin typeface="Calibri"/>
+              </a:rPr>
+              <a:t> cierra cada ítem · la ventana exacta la fija CDigital</a:t>
+            </a:r>
+          </a:p>
+        </p:txBody>
+      </p:sp>
+      <p:graphicFrame>
+        <p:nvGraphicFramePr>
+          <p:cNvPr id="5" name="Table 4"/>
+          <p:cNvGraphicFramePr>
+            <a:graphicFrameLocks noGrp="1"/>
+          </p:cNvGraphicFramePr>
+          <p:nvPr/>
+        </p:nvGraphicFramePr>
+        <p:xfrm>
+          <a:off x="640080" y="2011679"/>
+          <a:ext cx="10911533" cy="4297680"/>
+        </p:xfrm>
+        <a:graphic>
+          <a:graphicData uri="http://schemas.openxmlformats.org/drawingml/2006/table">
+            <a:tbl>
+              <a:tblPr>
+                <a:tableStyleId>{2D5ABB26-0587-4C30-8999-92F81FD0307C}</a:tableStyleId>
+              </a:tblPr>
+              <a:tblGrid>
+                <a:gridCol w="2659113"/>
+                <a:gridCol w="2659113"/>
+                <a:gridCol w="5593307"/>
+              </a:tblGrid>
+              <a:tr h="477520">
+                <a:tc>
+                  <a:txBody>
+                    <a:bodyPr/>
+                    <a:lstStyle/>
+                    <a:p>
+                      <a:pPr algn="l"/>
+                      <a:r>
+                        <a:rPr sz="1300" b="1" i="0">
+                          <a:solidFill>
+                            <a:srgbClr val="FFFFFF"/>
+                          </a:solidFill>
+                          <a:latin typeface="Calibri"/>
+                        </a:rPr>
+                        <a:t>Cierra en la semana de…</a:t>
+                      </a:r>
+                    </a:p>
+                  </a:txBody>
+                  <a:tcPr anchor="ctr" marL="109728" marR="91440" marT="36576" marB="36576">
+                    <a:solidFill>
+                      <a:srgbClr val="0C2340"/>
+                    </a:solidFill>
+                  </a:tcPr>
+                </a:tc>
+                <a:tc>
+                  <a:txBody>
+                    <a:bodyPr/>
+                    <a:lstStyle/>
+                    <a:p>
+                      <a:pPr algn="l"/>
+                      <a:r>
+                        <a:rPr sz="1300" b="1" i="0">
+                          <a:solidFill>
+                            <a:srgbClr val="FFFFFF"/>
+                          </a:solidFill>
+                          <a:latin typeface="Calibri"/>
+                        </a:rPr>
+                        <a:t>Entregable</a:t>
+                      </a:r>
+                    </a:p>
+                  </a:txBody>
+                  <a:tcPr anchor="ctr" marL="109728" marR="91440" marT="36576" marB="36576">
+                    <a:solidFill>
+                      <a:srgbClr val="0C2340"/>
+                    </a:solidFill>
+                  </a:tcPr>
+                </a:tc>
+                <a:tc>
+                  <a:txBody>
+                    <a:bodyPr/>
+                    <a:lstStyle/>
+                    <a:p>
+                      <a:pPr algn="l"/>
+                      <a:r>
+                        <a:rPr sz="1300" b="1" i="0">
+                          <a:solidFill>
+                            <a:srgbClr val="FFFFFF"/>
+                          </a:solidFill>
+                          <a:latin typeface="Calibri"/>
+                        </a:rPr>
+                        <a:t>Qué debes tener listo</a:t>
+                      </a:r>
+                    </a:p>
+                  </a:txBody>
+                  <a:tcPr anchor="ctr" marL="109728" marR="91440" marT="36576" marB="36576">
+                    <a:solidFill>
+                      <a:srgbClr val="0C2340"/>
+                    </a:solidFill>
+                  </a:tcPr>
+                </a:tc>
+              </a:tr>
+              <a:tr h="477520">
+                <a:tc>
+                  <a:txBody>
+                    <a:bodyPr/>
+                    <a:lstStyle/>
+                    <a:p>
+                      <a:pPr algn="l"/>
+                      <a:r>
+                        <a:rPr sz="1100" b="1" i="0">
+                          <a:solidFill>
+                            <a:srgbClr val="2B2B2B"/>
+                          </a:solidFill>
+                          <a:latin typeface="Calibri"/>
+                        </a:rPr>
+                        <a:t>Sesión 03</a:t>
+                      </a:r>
+                      <a:r>
+                        <a:rPr sz="1100" b="0" i="0">
+                          <a:solidFill>
+                            <a:srgbClr val="2B2B2B"/>
+                          </a:solidFill>
+                          <a:latin typeface="Calibri"/>
+                        </a:rPr>
+                        <a:t> · ya cerró</a:t>
+                      </a:r>
+                    </a:p>
+                  </a:txBody>
+                  <a:tcPr anchor="ctr" marL="109728" marR="91440" marT="36576" marB="36576">
+                    <a:solidFill>
+                      <a:srgbClr val="FFFFFF"/>
+                    </a:solidFill>
+                  </a:tcPr>
+                </a:tc>
+                <a:tc>
+                  <a:txBody>
+                    <a:bodyPr/>
+                    <a:lstStyle/>
+                    <a:p>
+                      <a:pPr algn="l"/>
+                      <a:r>
+                        <a:rPr sz="1100" b="1" i="0">
+                          <a:solidFill>
+                            <a:srgbClr val="2B2B2B"/>
+                          </a:solidFill>
+                          <a:latin typeface="Calibri"/>
+                        </a:rPr>
+                        <a:t>Quiz 1</a:t>
+                      </a:r>
+                      <a:r>
+                        <a:rPr sz="1100" b="0" i="0">
+                          <a:solidFill>
+                            <a:srgbClr val="2B2B2B"/>
+                          </a:solidFill>
+                          <a:latin typeface="Calibri"/>
+                        </a:rPr>
+                        <a:t> · Cuestionario · 6%</a:t>
+                      </a:r>
+                    </a:p>
+                  </a:txBody>
+                  <a:tcPr anchor="ctr" marL="109728" marR="91440" marT="36576" marB="36576">
+                    <a:solidFill>
+                      <a:srgbClr val="FFFFFF"/>
+                    </a:solidFill>
+                  </a:tcPr>
+                </a:tc>
+                <a:tc>
+                  <a:txBody>
+                    <a:bodyPr/>
+                    <a:lstStyle/>
+                    <a:p>
+                      <a:pPr algn="l"/>
+                      <a:r>
+                        <a:rPr sz="1100" b="0" i="0">
+                          <a:solidFill>
+                            <a:srgbClr val="2B2B2B"/>
+                          </a:solidFill>
+                          <a:latin typeface="Calibri"/>
+                        </a:rPr>
+                        <a:t>Repasa </a:t>
+                      </a:r>
+                      <a:r>
+                        <a:rPr sz="1100" b="1" i="0">
+                          <a:solidFill>
+                            <a:srgbClr val="2B2B2B"/>
+                          </a:solidFill>
+                          <a:latin typeface="Calibri"/>
+                        </a:rPr>
+                        <a:t>pregunta, objetivos y título</a:t>
+                      </a:r>
+                      <a:r>
+                        <a:rPr sz="1100" b="0" i="0">
+                          <a:solidFill>
+                            <a:srgbClr val="2B2B2B"/>
+                          </a:solidFill>
+                          <a:latin typeface="Calibri"/>
+                        </a:rPr>
+                        <a:t> y las variables de la pregunta-problema.</a:t>
+                      </a:r>
+                    </a:p>
+                  </a:txBody>
+                  <a:tcPr anchor="ctr" marL="109728" marR="91440" marT="36576" marB="36576">
+                    <a:solidFill>
+                      <a:srgbClr val="FFFFFF"/>
+                    </a:solidFill>
+                  </a:tcPr>
+                </a:tc>
+              </a:tr>
+              <a:tr h="477520">
+                <a:tc>
+                  <a:txBody>
+                    <a:bodyPr/>
+                    <a:lstStyle/>
+                    <a:p>
+                      <a:pPr algn="l"/>
+                      <a:r>
+                        <a:rPr sz="1100" b="1" i="0">
+                          <a:solidFill>
+                            <a:srgbClr val="2B2B2B"/>
+                          </a:solidFill>
+                          <a:latin typeface="Calibri"/>
+                        </a:rPr>
+                        <a:t>Sesión 06</a:t>
+                      </a:r>
+                      <a:r>
+                        <a:rPr sz="1100" b="0" i="0">
+                          <a:solidFill>
+                            <a:srgbClr val="2B2B2B"/>
+                          </a:solidFill>
+                          <a:latin typeface="Calibri"/>
+                        </a:rPr>
+                        <a:t> · ya cerró</a:t>
+                      </a:r>
+                    </a:p>
+                  </a:txBody>
+                  <a:tcPr anchor="ctr" marL="109728" marR="91440" marT="36576" marB="36576">
+                    <a:solidFill>
+                      <a:srgbClr val="F2F2F2"/>
+                    </a:solidFill>
+                  </a:tcPr>
+                </a:tc>
+                <a:tc>
+                  <a:txBody>
+                    <a:bodyPr/>
+                    <a:lstStyle/>
+                    <a:p>
+                      <a:pPr algn="l"/>
+                      <a:r>
+                        <a:rPr sz="1100" b="1" i="0">
+                          <a:solidFill>
+                            <a:srgbClr val="2B2B2B"/>
+                          </a:solidFill>
+                          <a:latin typeface="Calibri"/>
+                        </a:rPr>
+                        <a:t>Parcial 1</a:t>
+                      </a:r>
+                      <a:r>
+                        <a:rPr sz="1100" b="0" i="0">
+                          <a:solidFill>
+                            <a:srgbClr val="2B2B2B"/>
+                          </a:solidFill>
+                          <a:latin typeface="Calibri"/>
+                        </a:rPr>
+                        <a:t> · Cuestionario · 24%</a:t>
+                      </a:r>
+                    </a:p>
+                  </a:txBody>
+                  <a:tcPr anchor="ctr" marL="109728" marR="91440" marT="36576" marB="36576">
+                    <a:solidFill>
+                      <a:srgbClr val="F2F2F2"/>
+                    </a:solidFill>
+                  </a:tcPr>
+                </a:tc>
+                <a:tc>
+                  <a:txBody>
+                    <a:bodyPr/>
+                    <a:lstStyle/>
+                    <a:p>
+                      <a:pPr algn="l"/>
+                      <a:r>
+                        <a:rPr sz="1100" b="0" i="0">
+                          <a:solidFill>
+                            <a:srgbClr val="2B2B2B"/>
+                          </a:solidFill>
+                          <a:latin typeface="Calibri"/>
+                        </a:rPr>
+                        <a:t>Estudia la </a:t>
+                      </a:r>
+                      <a:r>
+                        <a:rPr sz="1100" b="1" i="0">
+                          <a:solidFill>
+                            <a:srgbClr val="2B2B2B"/>
+                          </a:solidFill>
+                          <a:latin typeface="Calibri"/>
+                        </a:rPr>
+                        <a:t>introducción</a:t>
+                      </a:r>
+                      <a:r>
+                        <a:rPr sz="1100" b="0" i="0">
+                          <a:solidFill>
+                            <a:srgbClr val="2B2B2B"/>
+                          </a:solidFill>
+                          <a:latin typeface="Calibri"/>
+                        </a:rPr>
+                        <a:t>, los referentes Fase I y el instrumento ya diseñado.</a:t>
+                      </a:r>
+                    </a:p>
+                  </a:txBody>
+                  <a:tcPr anchor="ctr" marL="109728" marR="91440" marT="36576" marB="36576">
+                    <a:solidFill>
+                      <a:srgbClr val="F2F2F2"/>
+                    </a:solidFill>
+                  </a:tcPr>
+                </a:tc>
+              </a:tr>
+              <a:tr h="477520">
+                <a:tc>
+                  <a:txBody>
+                    <a:bodyPr/>
+                    <a:lstStyle/>
+                    <a:p>
+                      <a:pPr algn="l"/>
+                      <a:r>
+                        <a:rPr sz="1100" b="1" i="0">
+                          <a:solidFill>
+                            <a:srgbClr val="2B2B2B"/>
+                          </a:solidFill>
+                          <a:latin typeface="Calibri"/>
+                        </a:rPr>
+                        <a:t>Sesión 08</a:t>
+                      </a:r>
+                      <a:r>
+                        <a:rPr sz="1100" b="0" i="0">
+                          <a:solidFill>
+                            <a:srgbClr val="2B2B2B"/>
+                          </a:solidFill>
+                          <a:latin typeface="Calibri"/>
+                        </a:rPr>
+                        <a:t> · ya cerró</a:t>
+                      </a:r>
+                    </a:p>
+                  </a:txBody>
+                  <a:tcPr anchor="ctr" marL="109728" marR="91440" marT="36576" marB="36576">
+                    <a:solidFill>
+                      <a:srgbClr val="FFFFFF"/>
+                    </a:solidFill>
+                  </a:tcPr>
+                </a:tc>
+                <a:tc>
+                  <a:txBody>
+                    <a:bodyPr/>
+                    <a:lstStyle/>
+                    <a:p>
+                      <a:pPr algn="l"/>
+                      <a:r>
+                        <a:rPr sz="1100" b="1" i="0">
+                          <a:solidFill>
+                            <a:srgbClr val="2B2B2B"/>
+                          </a:solidFill>
+                          <a:latin typeface="Calibri"/>
+                        </a:rPr>
+                        <a:t>Quiz 2</a:t>
+                      </a:r>
+                      <a:r>
+                        <a:rPr sz="1100" b="0" i="0">
+                          <a:solidFill>
+                            <a:srgbClr val="2B2B2B"/>
+                          </a:solidFill>
+                          <a:latin typeface="Calibri"/>
+                        </a:rPr>
+                        <a:t> · Cuestionario · 9%</a:t>
+                      </a:r>
+                    </a:p>
+                  </a:txBody>
+                  <a:tcPr anchor="ctr" marL="109728" marR="91440" marT="36576" marB="36576">
+                    <a:solidFill>
+                      <a:srgbClr val="FFFFFF"/>
+                    </a:solidFill>
+                  </a:tcPr>
+                </a:tc>
+                <a:tc>
+                  <a:txBody>
+                    <a:bodyPr/>
+                    <a:lstStyle/>
+                    <a:p>
+                      <a:pPr algn="l"/>
+                      <a:r>
+                        <a:rPr sz="1100" b="0" i="0">
+                          <a:solidFill>
+                            <a:srgbClr val="2B2B2B"/>
+                          </a:solidFill>
+                          <a:latin typeface="Calibri"/>
+                        </a:rPr>
+                        <a:t>Estudia </a:t>
+                      </a:r>
+                      <a:r>
+                        <a:rPr sz="1100" b="1" i="0">
+                          <a:solidFill>
+                            <a:srgbClr val="2B2B2B"/>
+                          </a:solidFill>
+                          <a:latin typeface="Calibri"/>
+                        </a:rPr>
+                        <a:t>comunidades de práctica</a:t>
+                      </a:r>
+                      <a:r>
+                        <a:rPr sz="1100" b="0" i="0">
+                          <a:solidFill>
+                            <a:srgbClr val="2B2B2B"/>
+                          </a:solidFill>
+                          <a:latin typeface="Calibri"/>
+                        </a:rPr>
+                        <a:t>, co-creación y análisis de datos.</a:t>
+                      </a:r>
+                    </a:p>
+                  </a:txBody>
+                  <a:tcPr anchor="ctr" marL="109728" marR="91440" marT="36576" marB="36576">
+                    <a:solidFill>
+                      <a:srgbClr val="FFFFFF"/>
+                    </a:solidFill>
+                  </a:tcPr>
+                </a:tc>
+              </a:tr>
+              <a:tr h="477520">
+                <a:tc>
+                  <a:txBody>
+                    <a:bodyPr/>
+                    <a:lstStyle/>
+                    <a:p>
+                      <a:pPr algn="l"/>
+                      <a:r>
+                        <a:rPr sz="1100" b="1" i="0">
+                          <a:solidFill>
+                            <a:srgbClr val="2B2B2B"/>
+                          </a:solidFill>
+                          <a:latin typeface="Calibri"/>
+                        </a:rPr>
+                        <a:t>Sesión 10</a:t>
+                      </a:r>
+                      <a:r>
+                        <a:rPr sz="1100" b="0" i="0">
+                          <a:solidFill>
+                            <a:srgbClr val="2B2B2B"/>
+                          </a:solidFill>
+                          <a:latin typeface="Calibri"/>
+                        </a:rPr>
+                        <a:t> · cierra esta semana</a:t>
+                      </a:r>
+                    </a:p>
+                  </a:txBody>
+                  <a:tcPr anchor="ctr" marL="109728" marR="91440" marT="36576" marB="36576">
+                    <a:solidFill>
+                      <a:srgbClr val="F2F2F2"/>
+                    </a:solidFill>
+                  </a:tcPr>
+                </a:tc>
+                <a:tc>
+                  <a:txBody>
+                    <a:bodyPr/>
+                    <a:lstStyle/>
+                    <a:p>
+                      <a:pPr algn="l"/>
+                      <a:r>
+                        <a:rPr sz="1100" b="1" i="0">
+                          <a:solidFill>
+                            <a:srgbClr val="2B2B2B"/>
+                          </a:solidFill>
+                          <a:latin typeface="Calibri"/>
+                        </a:rPr>
+                        <a:t>Parcial 2</a:t>
+                      </a:r>
+                      <a:r>
+                        <a:rPr sz="1100" b="0" i="0">
+                          <a:solidFill>
+                            <a:srgbClr val="2B2B2B"/>
+                          </a:solidFill>
+                          <a:latin typeface="Calibri"/>
+                        </a:rPr>
+                        <a:t> · Cuestionario · 21%</a:t>
+                      </a:r>
+                    </a:p>
+                  </a:txBody>
+                  <a:tcPr anchor="ctr" marL="109728" marR="91440" marT="36576" marB="36576">
+                    <a:solidFill>
+                      <a:srgbClr val="F2F2F2"/>
+                    </a:solidFill>
+                  </a:tcPr>
+                </a:tc>
+                <a:tc>
+                  <a:txBody>
+                    <a:bodyPr/>
+                    <a:lstStyle/>
+                    <a:p>
+                      <a:pPr algn="l"/>
+                      <a:r>
+                        <a:rPr sz="1100" b="0" i="0">
+                          <a:solidFill>
+                            <a:srgbClr val="2B2B2B"/>
+                          </a:solidFill>
+                          <a:latin typeface="Calibri"/>
+                        </a:rPr>
+                        <a:t>Estudia el cierre del </a:t>
+                      </a:r>
+                      <a:r>
+                        <a:rPr sz="1100" b="1" i="0">
+                          <a:solidFill>
+                            <a:srgbClr val="2B2B2B"/>
+                          </a:solidFill>
+                          <a:latin typeface="Calibri"/>
+                        </a:rPr>
+                        <a:t>marco teórico</a:t>
+                      </a:r>
+                      <a:r>
+                        <a:rPr sz="1100" b="0" i="0">
+                          <a:solidFill>
+                            <a:srgbClr val="2B2B2B"/>
+                          </a:solidFill>
+                          <a:latin typeface="Calibri"/>
+                        </a:rPr>
+                        <a:t>, los resultados y la discusión.</a:t>
+                      </a:r>
+                    </a:p>
+                  </a:txBody>
+                  <a:tcPr anchor="ctr" marL="109728" marR="91440" marT="36576" marB="36576">
+                    <a:solidFill>
+                      <a:srgbClr val="F2F2F2"/>
+                    </a:solidFill>
+                  </a:tcPr>
+                </a:tc>
+              </a:tr>
+              <a:tr h="477520">
+                <a:tc>
+                  <a:txBody>
+                    <a:bodyPr/>
+                    <a:lstStyle/>
+                    <a:p>
+                      <a:pPr algn="l"/>
+                      <a:r>
+                        <a:rPr sz="1100" b="1" i="0">
+                          <a:solidFill>
+                            <a:srgbClr val="2B2B2B"/>
+                          </a:solidFill>
+                          <a:latin typeface="Calibri"/>
+                        </a:rPr>
+                        <a:t>Sesión 12</a:t>
+                      </a:r>
+                      <a:r>
+                        <a:rPr sz="1100" b="0" i="0">
+                          <a:solidFill>
+                            <a:srgbClr val="2B2B2B"/>
+                          </a:solidFill>
+                          <a:latin typeface="Calibri"/>
+                        </a:rPr>
+                        <a:t> · pendiente</a:t>
+                      </a:r>
+                    </a:p>
+                  </a:txBody>
+                  <a:tcPr anchor="ctr" marL="109728" marR="91440" marT="36576" marB="36576">
+                    <a:solidFill>
+                      <a:srgbClr val="FFFFFF"/>
+                    </a:solidFill>
+                  </a:tcPr>
+                </a:tc>
+                <a:tc>
+                  <a:txBody>
+                    <a:bodyPr/>
+                    <a:lstStyle/>
+                    <a:p>
+                      <a:pPr algn="l"/>
+                      <a:r>
+                        <a:rPr sz="1100" b="1" i="0">
+                          <a:solidFill>
+                            <a:srgbClr val="2B2B2B"/>
+                          </a:solidFill>
+                          <a:latin typeface="Calibri"/>
+                        </a:rPr>
+                        <a:t>Quiz 3</a:t>
+                      </a:r>
+                      <a:r>
+                        <a:rPr sz="1100" b="0" i="0">
+                          <a:solidFill>
+                            <a:srgbClr val="2B2B2B"/>
+                          </a:solidFill>
+                          <a:latin typeface="Calibri"/>
+                        </a:rPr>
+                        <a:t> · Cuestionario · 4%</a:t>
+                      </a:r>
+                    </a:p>
+                  </a:txBody>
+                  <a:tcPr anchor="ctr" marL="109728" marR="91440" marT="36576" marB="36576">
+                    <a:solidFill>
+                      <a:srgbClr val="FFFFFF"/>
+                    </a:solidFill>
+                  </a:tcPr>
+                </a:tc>
+                <a:tc>
+                  <a:txBody>
+                    <a:bodyPr/>
+                    <a:lstStyle/>
+                    <a:p>
+                      <a:pPr algn="l"/>
+                      <a:r>
+                        <a:rPr sz="1100" b="0" i="0">
+                          <a:solidFill>
+                            <a:srgbClr val="2B2B2B"/>
+                          </a:solidFill>
+                          <a:latin typeface="Calibri"/>
+                        </a:rPr>
+                        <a:t>Ten claros </a:t>
+                      </a:r>
+                      <a:r>
+                        <a:rPr sz="1100" b="1" i="0">
+                          <a:solidFill>
+                            <a:srgbClr val="2B2B2B"/>
+                          </a:solidFill>
+                          <a:latin typeface="Calibri"/>
+                        </a:rPr>
+                        <a:t>resumen</a:t>
+                      </a:r>
+                      <a:r>
+                        <a:rPr sz="1100" b="0" i="0">
+                          <a:solidFill>
+                            <a:srgbClr val="2B2B2B"/>
+                          </a:solidFill>
+                          <a:latin typeface="Calibri"/>
+                        </a:rPr>
+                        <a:t>, palabras clave UNESCO, póster y verificación antiplagio.</a:t>
+                      </a:r>
+                    </a:p>
+                  </a:txBody>
+                  <a:tcPr anchor="ctr" marL="109728" marR="91440" marT="36576" marB="36576">
+                    <a:solidFill>
+                      <a:srgbClr val="FFFFFF"/>
+                    </a:solidFill>
+                  </a:tcPr>
+                </a:tc>
+              </a:tr>
+              <a:tr h="477520">
+                <a:tc>
+                  <a:txBody>
+                    <a:bodyPr/>
+                    <a:lstStyle/>
+                    <a:p>
+                      <a:pPr algn="l"/>
+                      <a:r>
+                        <a:rPr sz="1100" b="1" i="0">
+                          <a:solidFill>
+                            <a:srgbClr val="2B2B2B"/>
+                          </a:solidFill>
+                          <a:latin typeface="Calibri"/>
+                        </a:rPr>
+                        <a:t>Sesión 13</a:t>
+                      </a:r>
+                      <a:r>
+                        <a:rPr sz="1100" b="0" i="0">
+                          <a:solidFill>
+                            <a:srgbClr val="2B2B2B"/>
+                          </a:solidFill>
+                          <a:latin typeface="Calibri"/>
+                        </a:rPr>
+                        <a:t> · pendiente</a:t>
+                      </a:r>
+                    </a:p>
+                  </a:txBody>
+                  <a:tcPr anchor="ctr" marL="109728" marR="91440" marT="36576" marB="36576">
+                    <a:solidFill>
+                      <a:srgbClr val="F2F2F2"/>
+                    </a:solidFill>
+                  </a:tcPr>
+                </a:tc>
+                <a:tc>
+                  <a:txBody>
+                    <a:bodyPr/>
+                    <a:lstStyle/>
+                    <a:p>
+                      <a:pPr algn="l"/>
+                      <a:r>
+                        <a:rPr sz="1100" b="1" i="0">
+                          <a:solidFill>
+                            <a:srgbClr val="2B2B2B"/>
+                          </a:solidFill>
+                          <a:latin typeface="Calibri"/>
+                        </a:rPr>
+                        <a:t>ACA Final</a:t>
+                      </a:r>
+                      <a:r>
+                        <a:rPr sz="1100" b="0" i="0">
+                          <a:solidFill>
+                            <a:srgbClr val="2B2B2B"/>
+                          </a:solidFill>
+                          <a:latin typeface="Calibri"/>
+                        </a:rPr>
+                        <a:t> · Tarea · 32%</a:t>
+                      </a:r>
+                    </a:p>
+                  </a:txBody>
+                  <a:tcPr anchor="ctr" marL="109728" marR="91440" marT="36576" marB="36576">
+                    <a:solidFill>
+                      <a:srgbClr val="F2F2F2"/>
+                    </a:solidFill>
+                  </a:tcPr>
+                </a:tc>
+                <a:tc>
+                  <a:txBody>
+                    <a:bodyPr/>
+                    <a:lstStyle/>
+                    <a:p>
+                      <a:pPr algn="l"/>
+                      <a:r>
+                        <a:rPr sz="1100" b="0" i="0">
+                          <a:solidFill>
+                            <a:srgbClr val="2B2B2B"/>
+                          </a:solidFill>
+                          <a:latin typeface="Calibri"/>
+                        </a:rPr>
+                        <a:t>Sube el </a:t>
+                      </a:r>
+                      <a:r>
+                        <a:rPr sz="1100" b="1" i="0">
+                          <a:solidFill>
+                            <a:srgbClr val="2B2B2B"/>
+                          </a:solidFill>
+                          <a:latin typeface="Calibri"/>
+                        </a:rPr>
+                        <a:t>documento final</a:t>
+                      </a:r>
+                      <a:r>
+                        <a:rPr sz="1100" b="0" i="0">
+                          <a:solidFill>
+                            <a:srgbClr val="2B2B2B"/>
+                          </a:solidFill>
+                          <a:latin typeface="Calibri"/>
+                        </a:rPr>
+                        <a:t> en plantilla APA CUN: mínimo 4.000 palabras y 50 referencias.</a:t>
+                      </a:r>
+                    </a:p>
+                  </a:txBody>
+                  <a:tcPr anchor="ctr" marL="109728" marR="91440" marT="36576" marB="36576">
+                    <a:solidFill>
+                      <a:srgbClr val="F2F2F2"/>
+                    </a:solidFill>
+                  </a:tcPr>
+                </a:tc>
+              </a:tr>
+              <a:tr h="477520">
+                <a:tc>
+                  <a:txBody>
+                    <a:bodyPr/>
+                    <a:lstStyle/>
+                    <a:p>
+                      <a:pPr algn="l"/>
+                      <a:r>
+                        <a:rPr sz="1100" b="1" i="0">
+                          <a:solidFill>
+                            <a:srgbClr val="2B2B2B"/>
+                          </a:solidFill>
+                          <a:latin typeface="Calibri"/>
+                        </a:rPr>
+                        <a:t>Sesión 14</a:t>
+                      </a:r>
+                      <a:r>
+                        <a:rPr sz="1100" b="0" i="0">
+                          <a:solidFill>
+                            <a:srgbClr val="2B2B2B"/>
+                          </a:solidFill>
+                          <a:latin typeface="Calibri"/>
+                        </a:rPr>
+                        <a:t> · pendiente</a:t>
+                      </a:r>
+                    </a:p>
+                  </a:txBody>
+                  <a:tcPr anchor="ctr" marL="109728" marR="91440" marT="36576" marB="36576">
+                    <a:solidFill>
+                      <a:srgbClr val="FFFFFF"/>
+                    </a:solidFill>
+                  </a:tcPr>
+                </a:tc>
+                <a:tc>
+                  <a:txBody>
+                    <a:bodyPr/>
+                    <a:lstStyle/>
+                    <a:p>
+                      <a:pPr algn="l"/>
+                      <a:r>
+                        <a:rPr sz="1100" b="1" i="0">
+                          <a:solidFill>
+                            <a:srgbClr val="2B2B2B"/>
+                          </a:solidFill>
+                          <a:latin typeface="Calibri"/>
+                        </a:rPr>
+                        <a:t>Autoevaluación</a:t>
+                      </a:r>
+                      <a:r>
+                        <a:rPr sz="1100" b="0" i="0">
+                          <a:solidFill>
+                            <a:srgbClr val="2B2B2B"/>
+                          </a:solidFill>
+                          <a:latin typeface="Calibri"/>
+                        </a:rPr>
+                        <a:t> · Cuestionario · 2%</a:t>
+                      </a:r>
+                    </a:p>
+                  </a:txBody>
+                  <a:tcPr anchor="ctr" marL="109728" marR="91440" marT="36576" marB="36576">
+                    <a:solidFill>
+                      <a:srgbClr val="FFFFFF"/>
+                    </a:solidFill>
+                  </a:tcPr>
+                </a:tc>
+                <a:tc>
+                  <a:txBody>
+                    <a:bodyPr/>
+                    <a:lstStyle/>
+                    <a:p>
+                      <a:pPr algn="l"/>
+                      <a:r>
+                        <a:rPr sz="1100" b="0" i="0">
+                          <a:solidFill>
+                            <a:srgbClr val="2B2B2B"/>
+                          </a:solidFill>
+                          <a:latin typeface="Calibri"/>
+                        </a:rPr>
+                        <a:t>Diligénciala </a:t>
+                      </a:r>
+                      <a:r>
+                        <a:rPr sz="1100" b="1" i="0">
+                          <a:solidFill>
+                            <a:srgbClr val="2B2B2B"/>
+                          </a:solidFill>
+                          <a:latin typeface="Calibri"/>
+                        </a:rPr>
+                        <a:t>tú</a:t>
+                      </a:r>
+                      <a:r>
+                        <a:rPr sz="1100" b="0" i="0">
+                          <a:solidFill>
+                            <a:srgbClr val="2B2B2B"/>
+                          </a:solidFill>
+                          <a:latin typeface="Calibri"/>
+                        </a:rPr>
+                        <a:t>, dentro de su ventana, sobre tu participación real.</a:t>
+                      </a:r>
+                    </a:p>
+                  </a:txBody>
+                  <a:tcPr anchor="ctr" marL="109728" marR="91440" marT="36576" marB="36576">
+                    <a:solidFill>
+                      <a:srgbClr val="FFFFFF"/>
+                    </a:solidFill>
+                  </a:tcPr>
+                </a:tc>
+              </a:tr>
+              <a:tr h="477520">
+                <a:tc>
+                  <a:txBody>
+                    <a:bodyPr/>
+                    <a:lstStyle/>
+                    <a:p>
+                      <a:pPr algn="l"/>
+                      <a:r>
+                        <a:rPr sz="1100" b="1" i="0">
+                          <a:solidFill>
+                            <a:srgbClr val="2B2B2B"/>
+                          </a:solidFill>
+                          <a:latin typeface="Calibri"/>
+                        </a:rPr>
+                        <a:t>Sesión 14</a:t>
+                      </a:r>
+                      <a:r>
+                        <a:rPr sz="1100" b="0" i="0">
+                          <a:solidFill>
+                            <a:srgbClr val="2B2B2B"/>
+                          </a:solidFill>
+                          <a:latin typeface="Calibri"/>
+                        </a:rPr>
+                        <a:t> · pendiente</a:t>
+                      </a:r>
+                    </a:p>
+                  </a:txBody>
+                  <a:tcPr anchor="ctr" marL="109728" marR="91440" marT="36576" marB="36576">
+                    <a:solidFill>
+                      <a:srgbClr val="F2F2F2"/>
+                    </a:solidFill>
+                  </a:tcPr>
+                </a:tc>
+                <a:tc>
+                  <a:txBody>
+                    <a:bodyPr/>
+                    <a:lstStyle/>
+                    <a:p>
+                      <a:pPr algn="l"/>
+                      <a:r>
+                        <a:rPr sz="1100" b="1" i="0">
+                          <a:solidFill>
+                            <a:srgbClr val="2B2B2B"/>
+                          </a:solidFill>
+                          <a:latin typeface="Calibri"/>
+                        </a:rPr>
+                        <a:t>Coevaluación</a:t>
+                      </a:r>
+                      <a:r>
+                        <a:rPr sz="1100" b="0" i="0">
+                          <a:solidFill>
+                            <a:srgbClr val="2B2B2B"/>
+                          </a:solidFill>
+                          <a:latin typeface="Calibri"/>
+                        </a:rPr>
+                        <a:t> · Foro · 2%</a:t>
+                      </a:r>
+                    </a:p>
+                  </a:txBody>
+                  <a:tcPr anchor="ctr" marL="109728" marR="91440" marT="36576" marB="36576">
+                    <a:solidFill>
+                      <a:srgbClr val="F2F2F2"/>
+                    </a:solidFill>
+                  </a:tcPr>
+                </a:tc>
+                <a:tc>
+                  <a:txBody>
+                    <a:bodyPr/>
+                    <a:lstStyle/>
+                    <a:p>
+                      <a:pPr algn="l"/>
+                      <a:r>
+                        <a:rPr sz="1100" b="1" i="0">
+                          <a:solidFill>
+                            <a:srgbClr val="2B2B2B"/>
+                          </a:solidFill>
+                          <a:latin typeface="Calibri"/>
+                        </a:rPr>
+                        <a:t>Publica</a:t>
+                      </a:r>
+                      <a:r>
+                        <a:rPr sz="1100" b="0" i="0">
+                          <a:solidFill>
+                            <a:srgbClr val="2B2B2B"/>
+                          </a:solidFill>
+                          <a:latin typeface="Calibri"/>
+                        </a:rPr>
+                        <a:t> tu aporte dentro de la ventana: un borrador sin enviar no cuenta.</a:t>
+                      </a:r>
+                    </a:p>
+                  </a:txBody>
+                  <a:tcPr anchor="ctr" marL="109728" marR="91440" marT="36576" marB="36576">
+                    <a:solidFill>
+                      <a:srgbClr val="F2F2F2"/>
+                    </a:solidFill>
+                  </a:tcPr>
+                </a:tc>
+              </a:tr>
+            </a:tbl>
+          </a:graphicData>
+        </a:graphic>
+      </p:graphicFrame>
+      <p:sp>
+        <p:nvSpPr>
+          <p:cNvPr id="6" name="TextBox 5"/>
+          <p:cNvSpPr txBox="1"/>
+          <p:nvPr/>
+        </p:nvSpPr>
+        <p:spPr>
+          <a:xfrm>
+            <a:off x="640080" y="6080760"/>
+            <a:ext cx="10911535" cy="548640"/>
+          </a:xfrm>
+          <a:prstGeom prst="rect">
+            <a:avLst/>
+          </a:prstGeom>
+          <a:noFill/>
+        </p:spPr>
+        <p:txBody>
+          <a:bodyPr wrap="square" anchor="t" lIns="0" rIns="0" tIns="0" bIns="0">
+            <a:spAutoFit/>
+          </a:bodyPr>
+          <a:lstStyle/>
+          <a:p>
+            <a:r>
+              <a:rPr sz="1200" b="0" i="1">
+                <a:solidFill>
+                  <a:srgbClr val="2B2B2B"/>
+                </a:solidFill>
+                <a:latin typeface="Calibri"/>
+              </a:rPr>
+              <a:t>Esta misma tabla va al final de todas las sesiones. La </a:t>
+            </a:r>
+            <a:r>
+              <a:rPr sz="1200" b="1" i="1">
+                <a:solidFill>
+                  <a:srgbClr val="2B2B2B"/>
+                </a:solidFill>
+                <a:latin typeface="Calibri"/>
+              </a:rPr>
+              <a:t>fecha</a:t>
+            </a:r>
+            <a:r>
+              <a:rPr sz="1200" b="0" i="1">
+                <a:solidFill>
+                  <a:srgbClr val="2B2B2B"/>
+                </a:solidFill>
+                <a:latin typeface="Calibri"/>
+              </a:rPr>
+              <a:t> de cada ventana está en el enunciado del ítem (`Clases/Recursos/ACAs/`) y en el aula: si el aula y cualquier otro material se contradicen, </a:t>
+            </a:r>
+            <a:r>
+              <a:rPr sz="1200" b="1" i="1">
+                <a:solidFill>
+                  <a:srgbClr val="2B2B2B"/>
+                </a:solidFill>
+                <a:latin typeface="Calibri"/>
+              </a:rPr>
+              <a:t>manda el aula</a:t>
+            </a:r>
+            <a:r>
+              <a:rPr sz="1200" b="0" i="1">
+                <a:solidFill>
+                  <a:srgbClr val="2B2B2B"/>
+                </a:solidFill>
+                <a:latin typeface="Calibri"/>
+              </a:rPr>
+              <a:t>.</a:t>
+            </a:r>
+          </a:p>
+        </p:txBody>
+      </p:sp>
+      <p:sp>
+        <p:nvSpPr>
+          <p:cNvPr id="7" name="TextBox 6"/>
+          <p:cNvSpPr txBox="1"/>
+          <p:nvPr/>
+        </p:nvSpPr>
+        <p:spPr>
+          <a:xfrm>
+            <a:off x="11094415" y="6446520"/>
+            <a:ext cx="548640" cy="274320"/>
+          </a:xfrm>
+          <a:prstGeom prst="rect">
+            <a:avLst/>
+          </a:prstGeom>
+          <a:noFill/>
+        </p:spPr>
+        <p:txBody>
+          <a:bodyPr wrap="square" anchor="t" lIns="0" rIns="0" tIns="0" bIns="0">
+            <a:spAutoFit/>
+          </a:bodyPr>
+          <a:lstStyle/>
+          <a:p>
+            <a:pPr algn="r"/>
+            <a:r>
+              <a:rPr sz="1000" b="1" i="0">
+                <a:solidFill>
+                  <a:srgbClr val="8F989D"/>
+                </a:solidFill>
+                <a:latin typeface="Calibri"/>
+              </a:rPr>
+              <a:t>24</a:t>
+            </a:r>
+          </a:p>
+        </p:txBody>
+      </p:sp>
+    </p:spTree>
+  </p:cSld>
+  <p:clrMapOvr>
+    <a:masterClrMapping/>
+  </p:clrMapOvr>
+</p:sld>
+</file>
+
+<file path=ppt/slides/slide25.xml><?xml version="1.0" encoding="utf-8"?>
 <p:sld xmlns:a="http://schemas.openxmlformats.org/drawingml/2006/main" xmlns:p="http://schemas.openxmlformats.org/presentationml/2006/main" xmlns:r="http://schemas.openxmlformats.org/officeDocument/2006/relationships">
   <p:cSld>
     <p:bg>
@@ -11278,7 +12760,7 @@
                 </a:solidFill>
                 <a:latin typeface="Calibri"/>
               </a:rPr>
-              <a:t>El resumen es un espejo del artículo completo en ~200–250 palabras.</a:t>
+              <a:t>El resumen es un espejo del documento completo en ~200–250 palabras.</a:t>
             </a:r>
             <a:r>
               <a:rPr sz="1600" b="0" i="0">
@@ -11337,7 +12819,7 @@
                 </a:solidFill>
                 <a:latin typeface="Calibri"/>
               </a:rPr>
-              <a:t>●   Quien lo escribe en la Sesión 03 termina resumiendo un artículo que nunca ocurrió.</a:t>
+              <a:t>●   Quien lo escribe en la Sesión 03 termina resumiendo un documento que nunca ocurrió.</a:t>
             </a:r>
           </a:p>
           <a:p>
@@ -11498,7 +12980,7 @@
                 </a:solidFill>
                 <a:latin typeface="Calibri"/>
               </a:rPr>
-              <a:t>: "en este artículo se hablará de…", "a continuación se presentará…".</a:t>
+              <a:t>: "en este documento se hablará de…", "a continuación se presentará…".</a:t>
             </a:r>
           </a:p>
           <a:p>
@@ -13061,7 +14543,7 @@
                 </a:solidFill>
                 <a:latin typeface="Calibri"/>
               </a:rPr>
-              <a:t>"En el presente artículo se hablará sobre la importancia de la automatización de pruebas en el desarrollo de software moderno, tema de gran relevancia hoy en día."</a:t>
+              <a:t>"En el presente documento se hablará sobre la importancia de la automatización de pruebas en el desarrollo de software moderno, tema de gran relevancia hoy en día."</a:t>
             </a:r>
           </a:p>
         </p:txBody>
@@ -13998,7 +15480,7 @@
                 </a:solidFill>
                 <a:latin typeface="Calibri"/>
               </a:rPr>
-              <a:t> de su artículo dentro de repositorios y bases de datos.</a:t>
+              <a:t> de su documento dentro de repositorios y bases de datos.</a:t>
             </a:r>
           </a:p>
           <a:p>
@@ -14168,7 +15650,7 @@
                 </a:solidFill>
                 <a:latin typeface="Calibri"/>
               </a:rPr>
-              <a:t>–   Beneficio directo para usted: su artículo </a:t>
+              <a:t>–   Beneficio directo para usted: su documento </a:t>
             </a:r>
             <a:r>
               <a:rPr sz="1600" b="1" i="0">
